--- a/documents/Henry Frodsham FYP.pptx
+++ b/documents/Henry Frodsham FYP.pptx
@@ -6,13 +6,17 @@
   </p:sldMasterIdLst>
   <p:sldIdLst>
     <p:sldId id="256" r:id="rId2"/>
-    <p:sldId id="257" r:id="rId3"/>
-    <p:sldId id="262" r:id="rId4"/>
-    <p:sldId id="261" r:id="rId5"/>
-    <p:sldId id="263" r:id="rId6"/>
-    <p:sldId id="258" r:id="rId7"/>
-    <p:sldId id="259" r:id="rId8"/>
-    <p:sldId id="260" r:id="rId9"/>
+    <p:sldId id="258" r:id="rId3"/>
+    <p:sldId id="261" r:id="rId4"/>
+    <p:sldId id="257" r:id="rId5"/>
+    <p:sldId id="262" r:id="rId6"/>
+    <p:sldId id="263" r:id="rId7"/>
+    <p:sldId id="265" r:id="rId8"/>
+    <p:sldId id="266" r:id="rId9"/>
+    <p:sldId id="267" r:id="rId10"/>
+    <p:sldId id="268" r:id="rId11"/>
+    <p:sldId id="264" r:id="rId12"/>
+    <p:sldId id="260" r:id="rId13"/>
   </p:sldIdLst>
   <p:sldSz cx="12192000" cy="6858000"/>
   <p:notesSz cx="6858000" cy="9144000"/>
@@ -3377,7 +3381,7 @@
           <a:p>
             <a:r>
               <a:rPr lang="en-US" dirty="0"/>
-              <a:t>Henry Frodsham FYP</a:t>
+              <a:t>Henry Frodsham BSc FYP 2025-26</a:t>
             </a:r>
             <a:endParaRPr lang="en-GB" dirty="0"/>
           </a:p>
@@ -3412,6 +3416,313 @@
     <p:extLst>
       <p:ext uri="{BB962C8B-B14F-4D97-AF65-F5344CB8AC3E}">
         <p14:creationId xmlns:p14="http://schemas.microsoft.com/office/powerpoint/2010/main" val="846470811"/>
+      </p:ext>
+    </p:extLst>
+  </p:cSld>
+  <p:clrMapOvr>
+    <a:masterClrMapping/>
+  </p:clrMapOvr>
+</p:sld>
+</file>
+
+<file path=ppt/slides/slide10.xml><?xml version="1.0" encoding="utf-8"?>
+<p:sld xmlns:a="http://schemas.openxmlformats.org/drawingml/2006/main" xmlns:r="http://schemas.openxmlformats.org/officeDocument/2006/relationships" xmlns:p="http://schemas.openxmlformats.org/presentationml/2006/main">
+  <p:cSld>
+    <p:spTree>
+      <p:nvGrpSpPr>
+        <p:cNvPr id="1" name=""/>
+        <p:cNvGrpSpPr/>
+        <p:nvPr/>
+      </p:nvGrpSpPr>
+      <p:grpSpPr>
+        <a:xfrm>
+          <a:off x="0" y="0"/>
+          <a:ext cx="0" cy="0"/>
+          <a:chOff x="0" y="0"/>
+          <a:chExt cx="0" cy="0"/>
+        </a:xfrm>
+      </p:grpSpPr>
+      <p:sp>
+        <p:nvSpPr>
+          <p:cNvPr id="2" name="Title 1">
+            <a:extLst>
+              <a:ext uri="{FF2B5EF4-FFF2-40B4-BE49-F238E27FC236}">
+                <a16:creationId xmlns:a16="http://schemas.microsoft.com/office/drawing/2014/main" id="{A4D67C12-62BC-8960-7CBE-6D6F21CEBC05}"/>
+              </a:ext>
+            </a:extLst>
+          </p:cNvPr>
+          <p:cNvSpPr>
+            <a:spLocks noGrp="1"/>
+          </p:cNvSpPr>
+          <p:nvPr>
+            <p:ph type="title"/>
+          </p:nvPr>
+        </p:nvSpPr>
+        <p:spPr/>
+        <p:txBody>
+          <a:bodyPr/>
+          <a:lstStyle/>
+          <a:p>
+            <a:r>
+              <a:rPr lang="en-US" dirty="0"/>
+              <a:t>Other </a:t>
+            </a:r>
+            <a:endParaRPr lang="en-GB" dirty="0"/>
+          </a:p>
+        </p:txBody>
+      </p:sp>
+      <p:sp>
+        <p:nvSpPr>
+          <p:cNvPr id="3" name="Content Placeholder 2">
+            <a:extLst>
+              <a:ext uri="{FF2B5EF4-FFF2-40B4-BE49-F238E27FC236}">
+                <a16:creationId xmlns:a16="http://schemas.microsoft.com/office/drawing/2014/main" id="{A8B74D34-6533-6A30-0926-CA6937D31CAF}"/>
+              </a:ext>
+            </a:extLst>
+          </p:cNvPr>
+          <p:cNvSpPr>
+            <a:spLocks noGrp="1"/>
+          </p:cNvSpPr>
+          <p:nvPr>
+            <p:ph idx="1"/>
+          </p:nvPr>
+        </p:nvSpPr>
+        <p:spPr/>
+        <p:txBody>
+          <a:bodyPr/>
+          <a:lstStyle/>
+          <a:p>
+            <a:endParaRPr lang="en-GB"/>
+          </a:p>
+        </p:txBody>
+      </p:sp>
+    </p:spTree>
+    <p:extLst>
+      <p:ext uri="{BB962C8B-B14F-4D97-AF65-F5344CB8AC3E}">
+        <p14:creationId xmlns:p14="http://schemas.microsoft.com/office/powerpoint/2010/main" val="224198796"/>
+      </p:ext>
+    </p:extLst>
+  </p:cSld>
+  <p:clrMapOvr>
+    <a:masterClrMapping/>
+  </p:clrMapOvr>
+</p:sld>
+</file>
+
+<file path=ppt/slides/slide11.xml><?xml version="1.0" encoding="utf-8"?>
+<p:sld xmlns:a="http://schemas.openxmlformats.org/drawingml/2006/main" xmlns:r="http://schemas.openxmlformats.org/officeDocument/2006/relationships" xmlns:p="http://schemas.openxmlformats.org/presentationml/2006/main">
+  <p:cSld>
+    <p:spTree>
+      <p:nvGrpSpPr>
+        <p:cNvPr id="1" name=""/>
+        <p:cNvGrpSpPr/>
+        <p:nvPr/>
+      </p:nvGrpSpPr>
+      <p:grpSpPr>
+        <a:xfrm>
+          <a:off x="0" y="0"/>
+          <a:ext cx="0" cy="0"/>
+          <a:chOff x="0" y="0"/>
+          <a:chExt cx="0" cy="0"/>
+        </a:xfrm>
+      </p:grpSpPr>
+      <p:sp>
+        <p:nvSpPr>
+          <p:cNvPr id="2" name="Title 1">
+            <a:extLst>
+              <a:ext uri="{FF2B5EF4-FFF2-40B4-BE49-F238E27FC236}">
+                <a16:creationId xmlns:a16="http://schemas.microsoft.com/office/drawing/2014/main" id="{C47BF52C-3872-4408-1366-972E1C245FE4}"/>
+              </a:ext>
+            </a:extLst>
+          </p:cNvPr>
+          <p:cNvSpPr>
+            <a:spLocks noGrp="1"/>
+          </p:cNvSpPr>
+          <p:nvPr>
+            <p:ph type="title"/>
+          </p:nvPr>
+        </p:nvSpPr>
+        <p:spPr/>
+        <p:txBody>
+          <a:bodyPr/>
+          <a:lstStyle/>
+          <a:p>
+            <a:r>
+              <a:rPr lang="en-US" dirty="0"/>
+              <a:t>Major design patterns </a:t>
+            </a:r>
+            <a:r>
+              <a:rPr lang="en-US" dirty="0" err="1"/>
+              <a:t>ive</a:t>
+            </a:r>
+            <a:r>
+              <a:rPr lang="en-US" dirty="0"/>
+              <a:t> used – Event architecture</a:t>
+            </a:r>
+            <a:endParaRPr lang="en-GB" dirty="0"/>
+          </a:p>
+        </p:txBody>
+      </p:sp>
+      <p:sp>
+        <p:nvSpPr>
+          <p:cNvPr id="3" name="Content Placeholder 2">
+            <a:extLst>
+              <a:ext uri="{FF2B5EF4-FFF2-40B4-BE49-F238E27FC236}">
+                <a16:creationId xmlns:a16="http://schemas.microsoft.com/office/drawing/2014/main" id="{04469C97-239F-A2C4-55E5-0902A5AB5B6F}"/>
+              </a:ext>
+            </a:extLst>
+          </p:cNvPr>
+          <p:cNvSpPr>
+            <a:spLocks noGrp="1"/>
+          </p:cNvSpPr>
+          <p:nvPr>
+            <p:ph idx="1"/>
+          </p:nvPr>
+        </p:nvSpPr>
+        <p:spPr>
+          <a:xfrm>
+            <a:off x="838200" y="1825625"/>
+            <a:ext cx="4738991" cy="4351338"/>
+          </a:xfrm>
+        </p:spPr>
+        <p:txBody>
+          <a:bodyPr/>
+          <a:lstStyle/>
+          <a:p>
+            <a:pPr marL="0" indent="0">
+              <a:buNone/>
+            </a:pPr>
+            <a:r>
+              <a:rPr lang="en-US" b="1" dirty="0"/>
+              <a:t>What is event architecture?</a:t>
+            </a:r>
+            <a:br>
+              <a:rPr lang="en-US" b="1" dirty="0"/>
+            </a:br>
+            <a:br>
+              <a:rPr lang="en-US" b="1" dirty="0"/>
+            </a:br>
+            <a:r>
+              <a:rPr lang="en-US" dirty="0"/>
+              <a:t>- event architecture </a:t>
+            </a:r>
+            <a:endParaRPr lang="en-GB" b="1" dirty="0"/>
+          </a:p>
+        </p:txBody>
+      </p:sp>
+    </p:spTree>
+    <p:extLst>
+      <p:ext uri="{BB962C8B-B14F-4D97-AF65-F5344CB8AC3E}">
+        <p14:creationId xmlns:p14="http://schemas.microsoft.com/office/powerpoint/2010/main" val="3479991794"/>
+      </p:ext>
+    </p:extLst>
+  </p:cSld>
+  <p:clrMapOvr>
+    <a:masterClrMapping/>
+  </p:clrMapOvr>
+</p:sld>
+</file>
+
+<file path=ppt/slides/slide12.xml><?xml version="1.0" encoding="utf-8"?>
+<p:sld xmlns:a="http://schemas.openxmlformats.org/drawingml/2006/main" xmlns:r="http://schemas.openxmlformats.org/officeDocument/2006/relationships" xmlns:p="http://schemas.openxmlformats.org/presentationml/2006/main">
+  <p:cSld>
+    <p:spTree>
+      <p:nvGrpSpPr>
+        <p:cNvPr id="1" name=""/>
+        <p:cNvGrpSpPr/>
+        <p:nvPr/>
+      </p:nvGrpSpPr>
+      <p:grpSpPr>
+        <a:xfrm>
+          <a:off x="0" y="0"/>
+          <a:ext cx="0" cy="0"/>
+          <a:chOff x="0" y="0"/>
+          <a:chExt cx="0" cy="0"/>
+        </a:xfrm>
+      </p:grpSpPr>
+      <p:sp>
+        <p:nvSpPr>
+          <p:cNvPr id="2" name="Title 1">
+            <a:extLst>
+              <a:ext uri="{FF2B5EF4-FFF2-40B4-BE49-F238E27FC236}">
+                <a16:creationId xmlns:a16="http://schemas.microsoft.com/office/drawing/2014/main" id="{1CC34D4E-B377-97A4-8B38-9884B94EA691}"/>
+              </a:ext>
+            </a:extLst>
+          </p:cNvPr>
+          <p:cNvSpPr>
+            <a:spLocks noGrp="1"/>
+          </p:cNvSpPr>
+          <p:nvPr>
+            <p:ph type="title"/>
+          </p:nvPr>
+        </p:nvSpPr>
+        <p:spPr/>
+        <p:txBody>
+          <a:bodyPr/>
+          <a:lstStyle/>
+          <a:p>
+            <a:r>
+              <a:rPr lang="en-US" dirty="0"/>
+              <a:t>My vision for the final version of my project</a:t>
+            </a:r>
+            <a:endParaRPr lang="en-GB" dirty="0"/>
+          </a:p>
+        </p:txBody>
+      </p:sp>
+      <p:sp>
+        <p:nvSpPr>
+          <p:cNvPr id="3" name="Content Placeholder 2">
+            <a:extLst>
+              <a:ext uri="{FF2B5EF4-FFF2-40B4-BE49-F238E27FC236}">
+                <a16:creationId xmlns:a16="http://schemas.microsoft.com/office/drawing/2014/main" id="{3133708C-A77D-63CB-FFDE-68FE5E3D28A4}"/>
+              </a:ext>
+            </a:extLst>
+          </p:cNvPr>
+          <p:cNvSpPr>
+            <a:spLocks noGrp="1"/>
+          </p:cNvSpPr>
+          <p:nvPr>
+            <p:ph idx="1"/>
+          </p:nvPr>
+        </p:nvSpPr>
+        <p:spPr/>
+        <p:txBody>
+          <a:bodyPr/>
+          <a:lstStyle/>
+          <a:p>
+            <a:r>
+              <a:rPr lang="en-US" dirty="0"/>
+              <a:t>An RTS game that supports any game length</a:t>
+            </a:r>
+            <a:r>
+              <a:rPr lang="en-GB" dirty="0"/>
+              <a:t> with no significant slow down regardless of how long a given game is played for </a:t>
+            </a:r>
+          </a:p>
+          <a:p>
+            <a:r>
+              <a:rPr lang="en-GB" dirty="0"/>
+              <a:t>Seamless split screen implementation that allows for a user to disconnect or reconnect at any time then resume where they left off</a:t>
+            </a:r>
+          </a:p>
+          <a:p>
+            <a:r>
+              <a:rPr lang="en-GB" dirty="0"/>
+              <a:t>Feature rich interaction between users happening in real time with no delay</a:t>
+            </a:r>
+          </a:p>
+          <a:p>
+            <a:pPr marL="0" indent="0">
+              <a:buNone/>
+            </a:pPr>
+            <a:endParaRPr lang="en-US" dirty="0"/>
+          </a:p>
+        </p:txBody>
+      </p:sp>
+    </p:spTree>
+    <p:extLst>
+      <p:ext uri="{BB962C8B-B14F-4D97-AF65-F5344CB8AC3E}">
+        <p14:creationId xmlns:p14="http://schemas.microsoft.com/office/powerpoint/2010/main" val="268863310"/>
       </p:ext>
     </p:extLst>
   </p:cSld>
@@ -3443,7 +3754,7 @@
           <p:cNvPr id="2" name="Title 1">
             <a:extLst>
               <a:ext uri="{FF2B5EF4-FFF2-40B4-BE49-F238E27FC236}">
-                <a16:creationId xmlns:a16="http://schemas.microsoft.com/office/drawing/2014/main" id="{A38F2100-9E31-C725-4173-D6551AFD5E5E}"/>
+                <a16:creationId xmlns:a16="http://schemas.microsoft.com/office/drawing/2014/main" id="{8E2E6D9F-D07D-4740-DECB-C42A64056C85}"/>
               </a:ext>
             </a:extLst>
           </p:cNvPr>
@@ -3461,7 +3772,7 @@
           <a:p>
             <a:r>
               <a:rPr lang="en-US" dirty="0"/>
-              <a:t>An overview of my project</a:t>
+              <a:t>Why concurrency matters in game development</a:t>
             </a:r>
             <a:endParaRPr lang="en-GB" dirty="0"/>
           </a:p>
@@ -3472,7 +3783,7 @@
           <p:cNvPr id="3" name="Content Placeholder 2">
             <a:extLst>
               <a:ext uri="{FF2B5EF4-FFF2-40B4-BE49-F238E27FC236}">
-                <a16:creationId xmlns:a16="http://schemas.microsoft.com/office/drawing/2014/main" id="{7AB659AF-1579-F262-D689-CB5D6F1EDE66}"/>
+                <a16:creationId xmlns:a16="http://schemas.microsoft.com/office/drawing/2014/main" id="{ACBAA111-6C11-C444-9DC0-D077CA4F067A}"/>
               </a:ext>
             </a:extLst>
           </p:cNvPr>
@@ -3489,37 +3800,43 @@
           <a:lstStyle/>
           <a:p>
             <a:r>
+              <a:rPr lang="en-US" b="1" dirty="0"/>
+              <a:t>Responsiveness</a:t>
+            </a:r>
+            <a:r>
               <a:rPr lang="en-US" dirty="0"/>
-              <a:t>Written fully in </a:t>
-            </a:r>
-            <a:r>
-              <a:rPr lang="en-US" dirty="0" err="1"/>
-              <a:t>c++</a:t>
+              <a:t>: Keeps UI and input smooth during performance-intensive operations</a:t>
+            </a:r>
+          </a:p>
+          <a:p>
+            <a:r>
+              <a:rPr lang="en-US" b="1" dirty="0"/>
+              <a:t>Performance</a:t>
             </a:r>
             <a:r>
               <a:rPr lang="en-US" dirty="0"/>
-              <a:t> with Ogre3d as the primary renderer</a:t>
-            </a:r>
-          </a:p>
-          <a:p>
+              <a:t>: Parallelizes game logic across threads for faster execution</a:t>
+            </a:r>
+          </a:p>
+          <a:p>
+            <a:r>
+              <a:rPr lang="en-US" b="1" dirty="0"/>
+              <a:t>Hardware Utilization</a:t>
+            </a:r>
             <a:r>
               <a:rPr lang="en-US" dirty="0"/>
-              <a:t>Full concurrency focus with multiple users at the same time</a:t>
-            </a:r>
-          </a:p>
-          <a:p>
+              <a:t>: Leverages modern multi-core CPUs that would otherwise sit idle</a:t>
+            </a:r>
+          </a:p>
+          <a:p>
+            <a:r>
+              <a:rPr lang="en-US" b="1" dirty="0"/>
+              <a:t>Scalability</a:t>
+            </a:r>
             <a:r>
               <a:rPr lang="en-US" dirty="0"/>
-              <a:t>Event driven architecture with event queues</a:t>
-            </a:r>
-          </a:p>
-          <a:p>
-            <a:r>
-              <a:rPr lang="en-US" dirty="0"/>
-              <a:t>ECS for game object storage</a:t>
-            </a:r>
-          </a:p>
-          <a:p>
+              <a:t>: Enables games to handle more entities, complex AI, and detailed physics simulations simultaneously</a:t>
+            </a:r>
             <a:endParaRPr lang="en-GB" dirty="0"/>
           </a:p>
         </p:txBody>
@@ -3527,7 +3844,7 @@
     </p:spTree>
     <p:extLst>
       <p:ext uri="{BB962C8B-B14F-4D97-AF65-F5344CB8AC3E}">
-        <p14:creationId xmlns:p14="http://schemas.microsoft.com/office/powerpoint/2010/main" val="3562178587"/>
+        <p14:creationId xmlns:p14="http://schemas.microsoft.com/office/powerpoint/2010/main" val="2791909652"/>
       </p:ext>
     </p:extLst>
   </p:cSld>
@@ -3559,7 +3876,7 @@
           <p:cNvPr id="2" name="Title 1">
             <a:extLst>
               <a:ext uri="{FF2B5EF4-FFF2-40B4-BE49-F238E27FC236}">
-                <a16:creationId xmlns:a16="http://schemas.microsoft.com/office/drawing/2014/main" id="{222F46F9-E139-2D9E-B524-56ACEAFD482C}"/>
+                <a16:creationId xmlns:a16="http://schemas.microsoft.com/office/drawing/2014/main" id="{EF0A3931-18B6-C022-412D-D9556F471522}"/>
               </a:ext>
             </a:extLst>
           </p:cNvPr>
@@ -3577,7 +3894,7 @@
           <a:p>
             <a:r>
               <a:rPr lang="en-US" dirty="0"/>
-              <a:t>Why Ogre3d and how am I using it?</a:t>
+              <a:t>An overview of my project</a:t>
             </a:r>
             <a:endParaRPr lang="en-GB" dirty="0"/>
           </a:p>
@@ -3588,7 +3905,7 @@
           <p:cNvPr id="3" name="Content Placeholder 2">
             <a:extLst>
               <a:ext uri="{FF2B5EF4-FFF2-40B4-BE49-F238E27FC236}">
-                <a16:creationId xmlns:a16="http://schemas.microsoft.com/office/drawing/2014/main" id="{0182E657-D8AF-4756-8682-828B57AA357D}"/>
+                <a16:creationId xmlns:a16="http://schemas.microsoft.com/office/drawing/2014/main" id="{D7E4F512-C0E6-D180-A685-5F0C8A9C99CD}"/>
               </a:ext>
             </a:extLst>
           </p:cNvPr>
@@ -3604,14 +3921,76 @@
           <a:bodyPr/>
           <a:lstStyle/>
           <a:p>
-            <a:endParaRPr lang="en-GB"/>
+            <a:r>
+              <a:rPr lang="en-US" b="1" dirty="0"/>
+              <a:t>Genre</a:t>
+            </a:r>
+            <a:r>
+              <a:rPr lang="en-US" dirty="0"/>
+              <a:t>: Real-time strategy with split-screen multiplayer</a:t>
+            </a:r>
+          </a:p>
+          <a:p>
+            <a:r>
+              <a:rPr lang="en-US" b="1" dirty="0"/>
+              <a:t>Country based: </a:t>
+            </a:r>
+            <a:r>
+              <a:rPr lang="en-US" dirty="0"/>
+              <a:t>the classic strategy formula of multiple countries competing with </a:t>
+            </a:r>
+            <a:r>
+              <a:rPr lang="en-US" dirty="0" err="1"/>
+              <a:t>eachother</a:t>
+            </a:r>
+            <a:r>
+              <a:rPr lang="en-US" dirty="0"/>
+              <a:t> </a:t>
+            </a:r>
+            <a:endParaRPr lang="en-US" b="1" dirty="0"/>
+          </a:p>
+          <a:p>
+            <a:r>
+              <a:rPr lang="en-US" b="1" dirty="0"/>
+              <a:t>Performance focus: </a:t>
+            </a:r>
+            <a:r>
+              <a:rPr lang="en-US" dirty="0" err="1"/>
+              <a:t>optimised</a:t>
+            </a:r>
+            <a:r>
+              <a:rPr lang="en-US" dirty="0"/>
+              <a:t> for longer games with more units on the screen</a:t>
+            </a:r>
+            <a:endParaRPr lang="en-US" b="1" dirty="0"/>
+          </a:p>
+          <a:p>
+            <a:r>
+              <a:rPr lang="en-US" b="1" dirty="0"/>
+              <a:t>Local Multiplayer</a:t>
+            </a:r>
+            <a:r>
+              <a:rPr lang="en-US" dirty="0"/>
+              <a:t>: Supports up to 5 players (1 keyboard + 4 controllers)</a:t>
+            </a:r>
+          </a:p>
+          <a:p>
+            <a:r>
+              <a:rPr lang="en-US" b="1" dirty="0"/>
+              <a:t>Split screen with birds eye view: </a:t>
+            </a:r>
+            <a:r>
+              <a:rPr lang="en-US" dirty="0"/>
+              <a:t>each player has a dedicated portion of the screen with a bird's eye view of the game world</a:t>
+            </a:r>
+            <a:endParaRPr lang="en-US" b="1" dirty="0"/>
           </a:p>
         </p:txBody>
       </p:sp>
     </p:spTree>
     <p:extLst>
       <p:ext uri="{BB962C8B-B14F-4D97-AF65-F5344CB8AC3E}">
-        <p14:creationId xmlns:p14="http://schemas.microsoft.com/office/powerpoint/2010/main" val="557499388"/>
+        <p14:creationId xmlns:p14="http://schemas.microsoft.com/office/powerpoint/2010/main" val="2344679657"/>
       </p:ext>
     </p:extLst>
   </p:cSld>
@@ -3643,7 +4022,7 @@
           <p:cNvPr id="2" name="Title 1">
             <a:extLst>
               <a:ext uri="{FF2B5EF4-FFF2-40B4-BE49-F238E27FC236}">
-                <a16:creationId xmlns:a16="http://schemas.microsoft.com/office/drawing/2014/main" id="{DF8A3BB7-C438-DECA-C25B-5F7D57F57E8B}"/>
+                <a16:creationId xmlns:a16="http://schemas.microsoft.com/office/drawing/2014/main" id="{A38F2100-9E31-C725-4173-D6551AFD5E5E}"/>
               </a:ext>
             </a:extLst>
           </p:cNvPr>
@@ -3661,7 +4040,7 @@
           <a:p>
             <a:r>
               <a:rPr lang="en-US" dirty="0"/>
-              <a:t>why ECS and how am I using it?</a:t>
+              <a:t>The technical aspects of my project</a:t>
             </a:r>
             <a:endParaRPr lang="en-GB" dirty="0"/>
           </a:p>
@@ -3672,7 +4051,7 @@
           <p:cNvPr id="3" name="Content Placeholder 2">
             <a:extLst>
               <a:ext uri="{FF2B5EF4-FFF2-40B4-BE49-F238E27FC236}">
-                <a16:creationId xmlns:a16="http://schemas.microsoft.com/office/drawing/2014/main" id="{B37749E8-D7CA-7FE2-0AE1-40F3CA8CEA60}"/>
+                <a16:creationId xmlns:a16="http://schemas.microsoft.com/office/drawing/2014/main" id="{7AB659AF-1579-F262-D689-CB5D6F1EDE66}"/>
               </a:ext>
             </a:extLst>
           </p:cNvPr>
@@ -3683,19 +4062,84 @@
             <p:ph idx="1"/>
           </p:nvPr>
         </p:nvSpPr>
-        <p:spPr/>
-        <p:txBody>
-          <a:bodyPr/>
-          <a:lstStyle/>
-          <a:p>
-            <a:endParaRPr lang="en-GB"/>
+        <p:spPr>
+          <a:xfrm>
+            <a:off x="504265" y="1351429"/>
+            <a:ext cx="11268635" cy="5372100"/>
+          </a:xfrm>
+        </p:spPr>
+        <p:txBody>
+          <a:bodyPr>
+            <a:normAutofit/>
+          </a:bodyPr>
+          <a:lstStyle/>
+          <a:p>
+            <a:r>
+              <a:rPr lang="en-US" b="1" dirty="0"/>
+              <a:t>Programming language: </a:t>
+            </a:r>
+            <a:r>
+              <a:rPr lang="en-US" dirty="0"/>
+              <a:t>C++</a:t>
+            </a:r>
+          </a:p>
+          <a:p>
+            <a:r>
+              <a:rPr lang="en-US" b="1" dirty="0"/>
+              <a:t>Graphics engine: </a:t>
+            </a:r>
+            <a:r>
+              <a:rPr lang="en-US" dirty="0"/>
+              <a:t>Ogre3d</a:t>
+            </a:r>
+          </a:p>
+          <a:p>
+            <a:r>
+              <a:rPr lang="en-US" b="1" dirty="0"/>
+              <a:t>Concurrency focus: </a:t>
+            </a:r>
+            <a:r>
+              <a:rPr lang="en-US" dirty="0"/>
+              <a:t>each player has their own game instance running simultaneously using threads</a:t>
+            </a:r>
+          </a:p>
+          <a:p>
+            <a:r>
+              <a:rPr lang="en-US" b="1" dirty="0"/>
+              <a:t>Event architecture: </a:t>
+            </a:r>
+            <a:r>
+              <a:rPr lang="en-US" dirty="0"/>
+              <a:t>game instances communicate using events in conjunction with event queues to avoid race conditions</a:t>
+            </a:r>
+          </a:p>
+          <a:p>
+            <a:r>
+              <a:rPr lang="en-US" b="1" dirty="0"/>
+              <a:t>Entity storage: </a:t>
+            </a:r>
+            <a:r>
+              <a:rPr lang="en-US" dirty="0"/>
+              <a:t>ECS (entity component system) used for both storage and managing modular behavior of entities</a:t>
+            </a:r>
+          </a:p>
+          <a:p>
+            <a:r>
+              <a:rPr lang="en-US" b="1" dirty="0"/>
+              <a:t>Input handling: </a:t>
+            </a:r>
+            <a:r>
+              <a:rPr lang="en-US" dirty="0"/>
+              <a:t>SDL2 (software direct media layer) to read and distinguish multiple input devices</a:t>
+            </a:r>
+            <a:endParaRPr lang="en-US" b="1" dirty="0"/>
           </a:p>
         </p:txBody>
       </p:sp>
     </p:spTree>
     <p:extLst>
       <p:ext uri="{BB962C8B-B14F-4D97-AF65-F5344CB8AC3E}">
-        <p14:creationId xmlns:p14="http://schemas.microsoft.com/office/powerpoint/2010/main" val="3916104791"/>
+        <p14:creationId xmlns:p14="http://schemas.microsoft.com/office/powerpoint/2010/main" val="3562178587"/>
       </p:ext>
     </p:extLst>
   </p:cSld>
@@ -3727,7 +4171,7 @@
           <p:cNvPr id="2" name="Title 1">
             <a:extLst>
               <a:ext uri="{FF2B5EF4-FFF2-40B4-BE49-F238E27FC236}">
-                <a16:creationId xmlns:a16="http://schemas.microsoft.com/office/drawing/2014/main" id="{750A3C54-C49F-D134-6034-E4A332016B7F}"/>
+                <a16:creationId xmlns:a16="http://schemas.microsoft.com/office/drawing/2014/main" id="{1F0E351C-5813-7CE5-BB49-770C13723EAB}"/>
               </a:ext>
             </a:extLst>
           </p:cNvPr>
@@ -3745,45 +4189,158 @@
           <a:p>
             <a:r>
               <a:rPr lang="en-US" dirty="0"/>
-              <a:t>Where does concurrency fit in to </a:t>
-            </a:r>
-            <a:r>
-              <a:rPr lang="en-US"/>
-              <a:t>all this?</a:t>
-            </a:r>
-            <a:endParaRPr lang="en-GB"/>
-          </a:p>
-        </p:txBody>
-      </p:sp>
-      <p:sp>
-        <p:nvSpPr>
-          <p:cNvPr id="3" name="Content Placeholder 2">
-            <a:extLst>
-              <a:ext uri="{FF2B5EF4-FFF2-40B4-BE49-F238E27FC236}">
-                <a16:creationId xmlns:a16="http://schemas.microsoft.com/office/drawing/2014/main" id="{41B31B05-380E-BA83-89CC-1CEEF1416403}"/>
-              </a:ext>
-            </a:extLst>
-          </p:cNvPr>
-          <p:cNvSpPr>
-            <a:spLocks noGrp="1"/>
-          </p:cNvSpPr>
+              <a:t>What’s already implemented?</a:t>
+            </a:r>
+            <a:endParaRPr lang="en-GB" dirty="0"/>
+          </a:p>
+        </p:txBody>
+      </p:sp>
+      <p:pic>
+        <p:nvPicPr>
+          <p:cNvPr id="5" name="Content Placeholder 4">
+            <a:extLst>
+              <a:ext uri="{FF2B5EF4-FFF2-40B4-BE49-F238E27FC236}">
+                <a16:creationId xmlns:a16="http://schemas.microsoft.com/office/drawing/2014/main" id="{D2977087-9E1F-3EF7-AFC3-B6BB1DFFF060}"/>
+              </a:ext>
+            </a:extLst>
+          </p:cNvPr>
+          <p:cNvPicPr>
+            <a:picLocks noGrp="1" noChangeAspect="1"/>
+          </p:cNvPicPr>
           <p:nvPr>
             <p:ph idx="1"/>
           </p:nvPr>
-        </p:nvSpPr>
-        <p:spPr/>
-        <p:txBody>
-          <a:bodyPr/>
-          <a:lstStyle/>
-          <a:p>
-            <a:endParaRPr lang="en-GB"/>
+        </p:nvPicPr>
+        <p:blipFill>
+          <a:blip r:embed="rId2"/>
+          <a:stretch>
+            <a:fillRect/>
+          </a:stretch>
+        </p:blipFill>
+        <p:spPr>
+          <a:xfrm>
+            <a:off x="60513" y="1690688"/>
+            <a:ext cx="6193990" cy="3553665"/>
+          </a:xfrm>
+          <a:prstGeom prst="rect">
+            <a:avLst/>
+          </a:prstGeom>
+        </p:spPr>
+      </p:pic>
+      <p:sp>
+        <p:nvSpPr>
+          <p:cNvPr id="6" name="TextBox 5">
+            <a:extLst>
+              <a:ext uri="{FF2B5EF4-FFF2-40B4-BE49-F238E27FC236}">
+                <a16:creationId xmlns:a16="http://schemas.microsoft.com/office/drawing/2014/main" id="{CDAF71B0-ABC0-C6BE-2E0A-41A1447A19F2}"/>
+              </a:ext>
+            </a:extLst>
+          </p:cNvPr>
+          <p:cNvSpPr txBox="1"/>
+          <p:nvPr/>
+        </p:nvSpPr>
+        <p:spPr>
+          <a:xfrm>
+            <a:off x="6225125" y="1320494"/>
+            <a:ext cx="6017559" cy="5170646"/>
+          </a:xfrm>
+          <a:prstGeom prst="rect">
+            <a:avLst/>
+          </a:prstGeom>
+          <a:noFill/>
+        </p:spPr>
+        <p:txBody>
+          <a:bodyPr wrap="square" rtlCol="0">
+            <a:spAutoFit/>
+          </a:bodyPr>
+          <a:lstStyle/>
+          <a:p>
+            <a:pPr marL="285750" indent="-285750">
+              <a:buFontTx/>
+              <a:buChar char="-"/>
+            </a:pPr>
+            <a:r>
+              <a:rPr lang="en-US" sz="2400" b="1" dirty="0"/>
+              <a:t>Input handling: </a:t>
+            </a:r>
+            <a:r>
+              <a:rPr lang="en-US" sz="2400" dirty="0"/>
+              <a:t>all devices currently plugged in are recognized and read</a:t>
+            </a:r>
+            <a:endParaRPr lang="en-US" sz="2400" b="1" dirty="0"/>
+          </a:p>
+          <a:p>
+            <a:pPr marL="285750" indent="-285750">
+              <a:buFontTx/>
+              <a:buChar char="-"/>
+            </a:pPr>
+            <a:r>
+              <a:rPr lang="en-US" sz="2400" b="1" dirty="0"/>
+              <a:t>Split screen: </a:t>
+            </a:r>
+            <a:r>
+              <a:rPr lang="en-US" sz="2400" dirty="0"/>
+              <a:t>Each input device is assigned a portion of the screen </a:t>
+            </a:r>
+          </a:p>
+          <a:p>
+            <a:pPr marL="285750" indent="-285750">
+              <a:buFontTx/>
+              <a:buChar char="-"/>
+            </a:pPr>
+            <a:r>
+              <a:rPr lang="en-US" sz="2400" b="1" dirty="0"/>
+              <a:t>Disconnect handling: </a:t>
+            </a:r>
+            <a:r>
+              <a:rPr lang="en-US" sz="2400" dirty="0"/>
+              <a:t>controllers that are unplugged are automatically reconnected to the correct game instance once plugged back in</a:t>
+            </a:r>
+            <a:endParaRPr lang="en-US" sz="2400" b="1" dirty="0"/>
+          </a:p>
+          <a:p>
+            <a:pPr marL="285750" indent="-285750">
+              <a:buFontTx/>
+              <a:buChar char="-"/>
+            </a:pPr>
+            <a:r>
+              <a:rPr lang="en-US" sz="2400" b="1" dirty="0"/>
+              <a:t>Separate camera control: </a:t>
+            </a:r>
+            <a:r>
+              <a:rPr lang="en-US" sz="2400" dirty="0"/>
+              <a:t>each device controls the perspective on the assigned portion of the screen</a:t>
+            </a:r>
+            <a:endParaRPr lang="en-US" sz="2400" b="1" dirty="0"/>
+          </a:p>
+          <a:p>
+            <a:pPr marL="285750" indent="-285750">
+              <a:buFontTx/>
+              <a:buChar char="-"/>
+            </a:pPr>
+            <a:r>
+              <a:rPr lang="en-US" sz="2400" b="1" dirty="0"/>
+              <a:t>Entity storage: </a:t>
+            </a:r>
+            <a:r>
+              <a:rPr lang="en-US" sz="2400" dirty="0"/>
+              <a:t>the cube visible on the screen is stored using ECS</a:t>
+            </a:r>
+            <a:endParaRPr lang="en-US" sz="2400" b="1" dirty="0"/>
+          </a:p>
+          <a:p>
+            <a:pPr marL="285750" indent="-285750">
+              <a:buFontTx/>
+              <a:buChar char="-"/>
+            </a:pPr>
+            <a:endParaRPr lang="en-GB" dirty="0"/>
           </a:p>
         </p:txBody>
       </p:sp>
     </p:spTree>
     <p:extLst>
       <p:ext uri="{BB962C8B-B14F-4D97-AF65-F5344CB8AC3E}">
-        <p14:creationId xmlns:p14="http://schemas.microsoft.com/office/powerpoint/2010/main" val="620915863"/>
+        <p14:creationId xmlns:p14="http://schemas.microsoft.com/office/powerpoint/2010/main" val="1464994183"/>
       </p:ext>
     </p:extLst>
   </p:cSld>
@@ -3815,7 +4372,7 @@
           <p:cNvPr id="2" name="Title 1">
             <a:extLst>
               <a:ext uri="{FF2B5EF4-FFF2-40B4-BE49-F238E27FC236}">
-                <a16:creationId xmlns:a16="http://schemas.microsoft.com/office/drawing/2014/main" id="{8E2E6D9F-D07D-4740-DECB-C42A64056C85}"/>
+                <a16:creationId xmlns:a16="http://schemas.microsoft.com/office/drawing/2014/main" id="{63428104-876E-E9FC-4A7F-E152A0C8AECF}"/>
               </a:ext>
             </a:extLst>
           </p:cNvPr>
@@ -3833,7 +4390,7 @@
           <a:p>
             <a:r>
               <a:rPr lang="en-US" dirty="0"/>
-              <a:t>Why did I decide on this project?</a:t>
+              <a:t>Major technologies I’ve used - ECS</a:t>
             </a:r>
             <a:endParaRPr lang="en-GB" dirty="0"/>
           </a:p>
@@ -3844,7 +4401,7 @@
           <p:cNvPr id="3" name="Content Placeholder 2">
             <a:extLst>
               <a:ext uri="{FF2B5EF4-FFF2-40B4-BE49-F238E27FC236}">
-                <a16:creationId xmlns:a16="http://schemas.microsoft.com/office/drawing/2014/main" id="{ACBAA111-6C11-C444-9DC0-D077CA4F067A}"/>
+                <a16:creationId xmlns:a16="http://schemas.microsoft.com/office/drawing/2014/main" id="{726E14D4-3F41-0DB1-6EEC-800507D5C0CB}"/>
               </a:ext>
             </a:extLst>
           </p:cNvPr>
@@ -3855,29 +4412,138 @@
             <p:ph idx="1"/>
           </p:nvPr>
         </p:nvSpPr>
-        <p:spPr/>
-        <p:txBody>
-          <a:bodyPr/>
-          <a:lstStyle/>
-          <a:p>
+        <p:spPr>
+          <a:xfrm>
+            <a:off x="176719" y="1845080"/>
+            <a:ext cx="5257800" cy="4351338"/>
+          </a:xfrm>
+        </p:spPr>
+        <p:txBody>
+          <a:bodyPr/>
+          <a:lstStyle/>
+          <a:p>
+            <a:pPr marL="0" indent="0">
+              <a:buNone/>
+            </a:pPr>
             <a:r>
               <a:rPr lang="en-US" dirty="0"/>
-              <a:t>True local multiplayer is rare, especially in the RTS genre</a:t>
-            </a:r>
-          </a:p>
-          <a:p>
-            <a:r>
+              <a:t>	</a:t>
+            </a:r>
+            <a:r>
+              <a:rPr lang="en-US" b="1" dirty="0"/>
+              <a:t>What is ECS?</a:t>
+            </a:r>
+            <a:br>
               <a:rPr lang="en-US" dirty="0"/>
-              <a:t>Current solutions to the problems I am tackling encounter significant performance issues</a:t>
-            </a:r>
-          </a:p>
-          <a:p>
-            <a:r>
+            </a:br>
+            <a:br>
               <a:rPr lang="en-US" dirty="0"/>
-              <a:t>RTS is an ideal scenario for a concurrent environment</a:t>
-            </a:r>
-          </a:p>
-          <a:p>
+            </a:br>
+            <a:r>
+              <a:rPr lang="en-US" dirty="0"/>
+              <a:t>- ECS (entity component system) is a method of </a:t>
+            </a:r>
+            <a:r>
+              <a:rPr lang="en-US"/>
+              <a:t>storing data, </a:t>
+            </a:r>
+            <a:r>
+              <a:rPr lang="en-US" dirty="0"/>
+              <a:t>separated into entities</a:t>
+            </a:r>
+          </a:p>
+          <a:p>
+            <a:pPr marL="0" indent="0">
+              <a:buNone/>
+            </a:pPr>
+            <a:r>
+              <a:rPr lang="en-US" dirty="0"/>
+              <a:t>- Each entity is separated into components which can be added or removed at any time</a:t>
+            </a:r>
+            <a:br>
+              <a:rPr lang="en-US" dirty="0"/>
+            </a:br>
+            <a:endParaRPr lang="en-GB" dirty="0"/>
+          </a:p>
+        </p:txBody>
+      </p:sp>
+      <p:sp>
+        <p:nvSpPr>
+          <p:cNvPr id="4" name="TextBox 3">
+            <a:extLst>
+              <a:ext uri="{FF2B5EF4-FFF2-40B4-BE49-F238E27FC236}">
+                <a16:creationId xmlns:a16="http://schemas.microsoft.com/office/drawing/2014/main" id="{8F77F3C4-960D-BC81-6AB2-FE1F402F9712}"/>
+              </a:ext>
+            </a:extLst>
+          </p:cNvPr>
+          <p:cNvSpPr txBox="1"/>
+          <p:nvPr/>
+        </p:nvSpPr>
+        <p:spPr>
+          <a:xfrm>
+            <a:off x="5492885" y="1845080"/>
+            <a:ext cx="6355404" cy="4401205"/>
+          </a:xfrm>
+          <a:prstGeom prst="rect">
+            <a:avLst/>
+          </a:prstGeom>
+          <a:noFill/>
+        </p:spPr>
+        <p:txBody>
+          <a:bodyPr wrap="square" rtlCol="0">
+            <a:spAutoFit/>
+          </a:bodyPr>
+          <a:lstStyle/>
+          <a:p>
+            <a:r>
+              <a:rPr lang="en-US" dirty="0"/>
+              <a:t>	</a:t>
+            </a:r>
+            <a:r>
+              <a:rPr lang="en-US" sz="2800" dirty="0"/>
+              <a:t>	</a:t>
+            </a:r>
+            <a:r>
+              <a:rPr lang="en-US" sz="2800" b="1" dirty="0"/>
+              <a:t>why ECS?</a:t>
+            </a:r>
+            <a:br>
+              <a:rPr lang="en-US" sz="2800" b="1" dirty="0"/>
+            </a:br>
+            <a:r>
+              <a:rPr lang="en-US" sz="2800" dirty="0"/>
+              <a:t>- </a:t>
+            </a:r>
+            <a:r>
+              <a:rPr lang="en-US" sz="2800" b="1" dirty="0"/>
+              <a:t> </a:t>
+            </a:r>
+            <a:r>
+              <a:rPr lang="en-US" sz="2800" dirty="0"/>
+              <a:t>time complexity of O(1) for component and entity operations</a:t>
+            </a:r>
+            <a:br>
+              <a:rPr lang="en-US" sz="2800" dirty="0"/>
+            </a:br>
+            <a:r>
+              <a:rPr lang="en-US" sz="2800" dirty="0"/>
+              <a:t>- entities can be grouped together, allowing similar entities to be stored contiguously </a:t>
+            </a:r>
+            <a:br>
+              <a:rPr lang="en-US" sz="2800" dirty="0"/>
+            </a:br>
+            <a:r>
+              <a:rPr lang="en-US" sz="2800" dirty="0"/>
+              <a:t>- extremely useful for my project, each game “unit” can easily have </a:t>
+            </a:r>
+            <a:r>
+              <a:rPr lang="en-US" sz="2800" dirty="0" err="1"/>
+              <a:t>behaviour</a:t>
+            </a:r>
+            <a:r>
+              <a:rPr lang="en-US" sz="2800" dirty="0"/>
+              <a:t> added or removed to it based on its components</a:t>
+            </a:r>
             <a:endParaRPr lang="en-GB" dirty="0"/>
           </a:p>
         </p:txBody>
@@ -3885,7 +4551,7 @@
     </p:spTree>
     <p:extLst>
       <p:ext uri="{BB962C8B-B14F-4D97-AF65-F5344CB8AC3E}">
-        <p14:creationId xmlns:p14="http://schemas.microsoft.com/office/powerpoint/2010/main" val="2791909652"/>
+        <p14:creationId xmlns:p14="http://schemas.microsoft.com/office/powerpoint/2010/main" val="3989243193"/>
       </p:ext>
     </p:extLst>
   </p:cSld>
@@ -3917,7 +4583,7 @@
           <p:cNvPr id="2" name="Title 1">
             <a:extLst>
               <a:ext uri="{FF2B5EF4-FFF2-40B4-BE49-F238E27FC236}">
-                <a16:creationId xmlns:a16="http://schemas.microsoft.com/office/drawing/2014/main" id="{9D38466A-51EC-B1F8-8C58-25FA9C91A876}"/>
+                <a16:creationId xmlns:a16="http://schemas.microsoft.com/office/drawing/2014/main" id="{9A4ED057-1A76-43BD-4580-9F7184073BFB}"/>
               </a:ext>
             </a:extLst>
           </p:cNvPr>
@@ -3935,7 +4601,7 @@
           <a:p>
             <a:r>
               <a:rPr lang="en-US" dirty="0"/>
-              <a:t>What is the current state of my project?</a:t>
+              <a:t>example of how I use ECS in my project</a:t>
             </a:r>
             <a:endParaRPr lang="en-GB" dirty="0"/>
           </a:p>
@@ -3946,7 +4612,7 @@
           <p:cNvPr id="3" name="Content Placeholder 2">
             <a:extLst>
               <a:ext uri="{FF2B5EF4-FFF2-40B4-BE49-F238E27FC236}">
-                <a16:creationId xmlns:a16="http://schemas.microsoft.com/office/drawing/2014/main" id="{C3EEAC57-9E73-9070-9ADB-667E5F3D45BB}"/>
+                <a16:creationId xmlns:a16="http://schemas.microsoft.com/office/drawing/2014/main" id="{DB443C9A-1B25-BA2F-EF0D-ACCECCBC688D}"/>
               </a:ext>
             </a:extLst>
           </p:cNvPr>
@@ -3957,35 +4623,67 @@
             <p:ph idx="1"/>
           </p:nvPr>
         </p:nvSpPr>
-        <p:spPr/>
-        <p:txBody>
-          <a:bodyPr/>
-          <a:lstStyle/>
-          <a:p>
+        <p:spPr>
+          <a:xfrm>
+            <a:off x="1207851" y="1561777"/>
+            <a:ext cx="4174787" cy="1650392"/>
+          </a:xfrm>
+        </p:spPr>
+        <p:txBody>
+          <a:bodyPr/>
+          <a:lstStyle/>
+          <a:p>
+            <a:pPr marL="0" indent="0">
+              <a:buNone/>
+            </a:pPr>
             <a:r>
               <a:rPr lang="en-US" dirty="0"/>
-              <a:t>Full concurrent input activity across multiple devices</a:t>
-            </a:r>
-          </a:p>
-          <a:p>
-            <a:r>
-              <a:rPr lang="en-US" dirty="0"/>
-              <a:t>Multiple game cameras with independent controls</a:t>
-            </a:r>
-          </a:p>
-          <a:p>
-            <a:r>
-              <a:rPr lang="en-US" dirty="0"/>
-              <a:t>complete groundwork for the future implementation of an RTS game</a:t>
+              <a:t>Creation of the example cube</a:t>
             </a:r>
             <a:endParaRPr lang="en-GB" dirty="0"/>
+          </a:p>
+        </p:txBody>
+      </p:sp>
+      <p:sp>
+        <p:nvSpPr>
+          <p:cNvPr id="4" name="TextBox 3">
+            <a:extLst>
+              <a:ext uri="{FF2B5EF4-FFF2-40B4-BE49-F238E27FC236}">
+                <a16:creationId xmlns:a16="http://schemas.microsoft.com/office/drawing/2014/main" id="{5D9D8501-6259-3DFF-FD8E-F273A202FB48}"/>
+              </a:ext>
+            </a:extLst>
+          </p:cNvPr>
+          <p:cNvSpPr txBox="1"/>
+          <p:nvPr/>
+        </p:nvSpPr>
+        <p:spPr>
+          <a:xfrm>
+            <a:off x="7665398" y="1561777"/>
+            <a:ext cx="3975371" cy="954107"/>
+          </a:xfrm>
+          <a:prstGeom prst="rect">
+            <a:avLst/>
+          </a:prstGeom>
+          <a:noFill/>
+        </p:spPr>
+        <p:txBody>
+          <a:bodyPr wrap="square" rtlCol="0">
+            <a:spAutoFit/>
+          </a:bodyPr>
+          <a:lstStyle/>
+          <a:p>
+            <a:r>
+              <a:rPr lang="en-US" sz="2800" dirty="0"/>
+              <a:t>The stored components of the cube</a:t>
+            </a:r>
+            <a:endParaRPr lang="en-GB" sz="2800" dirty="0"/>
           </a:p>
         </p:txBody>
       </p:sp>
     </p:spTree>
     <p:extLst>
       <p:ext uri="{BB962C8B-B14F-4D97-AF65-F5344CB8AC3E}">
-        <p14:creationId xmlns:p14="http://schemas.microsoft.com/office/powerpoint/2010/main" val="1106514468"/>
+        <p14:creationId xmlns:p14="http://schemas.microsoft.com/office/powerpoint/2010/main" val="3745132934"/>
       </p:ext>
     </p:extLst>
   </p:cSld>
@@ -4017,7 +4715,7 @@
           <p:cNvPr id="2" name="Title 1">
             <a:extLst>
               <a:ext uri="{FF2B5EF4-FFF2-40B4-BE49-F238E27FC236}">
-                <a16:creationId xmlns:a16="http://schemas.microsoft.com/office/drawing/2014/main" id="{1CC34D4E-B377-97A4-8B38-9884B94EA691}"/>
+                <a16:creationId xmlns:a16="http://schemas.microsoft.com/office/drawing/2014/main" id="{953F7429-34F6-0AB8-B55A-D1F166715553}"/>
               </a:ext>
             </a:extLst>
           </p:cNvPr>
@@ -4035,7 +4733,15 @@
           <a:p>
             <a:r>
               <a:rPr lang="en-US" dirty="0"/>
-              <a:t>My vision for the final version of my project</a:t>
+              <a:t>Major technologies </a:t>
+            </a:r>
+            <a:r>
+              <a:rPr lang="en-US" dirty="0" err="1"/>
+              <a:t>ive</a:t>
+            </a:r>
+            <a:r>
+              <a:rPr lang="en-US" dirty="0"/>
+              <a:t> used – SDL2</a:t>
             </a:r>
             <a:endParaRPr lang="en-GB" dirty="0"/>
           </a:p>
@@ -4046,7 +4752,7 @@
           <p:cNvPr id="3" name="Content Placeholder 2">
             <a:extLst>
               <a:ext uri="{FF2B5EF4-FFF2-40B4-BE49-F238E27FC236}">
-                <a16:creationId xmlns:a16="http://schemas.microsoft.com/office/drawing/2014/main" id="{3133708C-A77D-63CB-FFDE-68FE5E3D28A4}"/>
+                <a16:creationId xmlns:a16="http://schemas.microsoft.com/office/drawing/2014/main" id="{9E7E706C-D5D8-C6AB-669C-DD0BA3DD42B2}"/>
               </a:ext>
             </a:extLst>
           </p:cNvPr>
@@ -4057,44 +4763,480 @@
             <p:ph idx="1"/>
           </p:nvPr>
         </p:nvSpPr>
-        <p:spPr/>
-        <p:txBody>
-          <a:bodyPr/>
-          <a:lstStyle/>
-          <a:p>
+        <p:spPr>
+          <a:xfrm>
+            <a:off x="838200" y="1825625"/>
+            <a:ext cx="4233153" cy="4351338"/>
+          </a:xfrm>
+        </p:spPr>
+        <p:txBody>
+          <a:bodyPr/>
+          <a:lstStyle/>
+          <a:p>
+            <a:pPr marL="0" indent="0">
+              <a:buNone/>
+            </a:pPr>
+            <a:r>
+              <a:rPr lang="en-US" b="1" dirty="0"/>
+              <a:t>What is SDL2</a:t>
+            </a:r>
+          </a:p>
+          <a:p>
+            <a:pPr>
+              <a:buFontTx/>
+              <a:buChar char="-"/>
+            </a:pPr>
             <a:r>
               <a:rPr lang="en-US" dirty="0"/>
-              <a:t>An RTS game that supports any game length</a:t>
-            </a:r>
-            <a:r>
-              <a:rPr lang="en-GB" dirty="0"/>
-              <a:t> with no significant slow down regardless of how long a given game is played for </a:t>
-            </a:r>
-          </a:p>
-          <a:p>
-            <a:r>
-              <a:rPr lang="en-GB" dirty="0"/>
-              <a:t>Seamless split screen implementation that allows for a user to disconnect or reconnect at any time then resume where they left off</a:t>
-            </a:r>
-          </a:p>
-          <a:p>
-            <a:r>
-              <a:rPr lang="en-GB" dirty="0"/>
-              <a:t>Feature rich interaction between users happening in real time with no delay</a:t>
+              <a:t>SDL (simple direct media layer) is a </a:t>
+            </a:r>
+            <a:r>
+              <a:rPr lang="en-US" dirty="0" err="1"/>
+              <a:t>c++</a:t>
+            </a:r>
+            <a:r>
+              <a:rPr lang="en-US" dirty="0"/>
+              <a:t> library that provides a layer of abstraction to hardware. This allows it to read input from a variety of devices and isn’t platform specific</a:t>
             </a:r>
           </a:p>
           <a:p>
             <a:pPr marL="0" indent="0">
               <a:buNone/>
             </a:pPr>
+            <a:endParaRPr lang="en-GB" dirty="0"/>
+          </a:p>
+        </p:txBody>
+      </p:sp>
+      <p:sp>
+        <p:nvSpPr>
+          <p:cNvPr id="4" name="Content Placeholder 2">
+            <a:extLst>
+              <a:ext uri="{FF2B5EF4-FFF2-40B4-BE49-F238E27FC236}">
+                <a16:creationId xmlns:a16="http://schemas.microsoft.com/office/drawing/2014/main" id="{A5865011-889A-2537-AD4B-2F5C20B5FBBA}"/>
+              </a:ext>
+            </a:extLst>
+          </p:cNvPr>
+          <p:cNvSpPr txBox="1">
+            <a:spLocks/>
+          </p:cNvSpPr>
+          <p:nvPr/>
+        </p:nvSpPr>
+        <p:spPr>
+          <a:xfrm>
+            <a:off x="5854430" y="1880749"/>
+            <a:ext cx="4233153" cy="4351338"/>
+          </a:xfrm>
+          <a:prstGeom prst="rect">
+            <a:avLst/>
+          </a:prstGeom>
+        </p:spPr>
+        <p:txBody>
+          <a:bodyPr vert="horz" lIns="91440" tIns="45720" rIns="91440" bIns="45720" rtlCol="0">
+            <a:normAutofit/>
+          </a:bodyPr>
+          <a:lstStyle>
+            <a:lvl1pPr marL="228600" indent="-228600" algn="l" defTabSz="914400" rtl="0" eaLnBrk="1" latinLnBrk="0" hangingPunct="1">
+              <a:lnSpc>
+                <a:spcPct val="90000"/>
+              </a:lnSpc>
+              <a:spcBef>
+                <a:spcPts val="1000"/>
+              </a:spcBef>
+              <a:buFont typeface="Arial" panose="020B0604020202020204" pitchFamily="34" charset="0"/>
+              <a:buChar char="•"/>
+              <a:defRPr sz="2800" kern="1200">
+                <a:solidFill>
+                  <a:schemeClr val="tx1"/>
+                </a:solidFill>
+                <a:latin typeface="+mn-lt"/>
+                <a:ea typeface="+mn-ea"/>
+                <a:cs typeface="+mn-cs"/>
+              </a:defRPr>
+            </a:lvl1pPr>
+            <a:lvl2pPr marL="685800" indent="-228600" algn="l" defTabSz="914400" rtl="0" eaLnBrk="1" latinLnBrk="0" hangingPunct="1">
+              <a:lnSpc>
+                <a:spcPct val="90000"/>
+              </a:lnSpc>
+              <a:spcBef>
+                <a:spcPts val="500"/>
+              </a:spcBef>
+              <a:buFont typeface="Arial" panose="020B0604020202020204" pitchFamily="34" charset="0"/>
+              <a:buChar char="•"/>
+              <a:defRPr sz="2400" kern="1200">
+                <a:solidFill>
+                  <a:schemeClr val="tx1"/>
+                </a:solidFill>
+                <a:latin typeface="+mn-lt"/>
+                <a:ea typeface="+mn-ea"/>
+                <a:cs typeface="+mn-cs"/>
+              </a:defRPr>
+            </a:lvl2pPr>
+            <a:lvl3pPr marL="1143000" indent="-228600" algn="l" defTabSz="914400" rtl="0" eaLnBrk="1" latinLnBrk="0" hangingPunct="1">
+              <a:lnSpc>
+                <a:spcPct val="90000"/>
+              </a:lnSpc>
+              <a:spcBef>
+                <a:spcPts val="500"/>
+              </a:spcBef>
+              <a:buFont typeface="Arial" panose="020B0604020202020204" pitchFamily="34" charset="0"/>
+              <a:buChar char="•"/>
+              <a:defRPr sz="2000" kern="1200">
+                <a:solidFill>
+                  <a:schemeClr val="tx1"/>
+                </a:solidFill>
+                <a:latin typeface="+mn-lt"/>
+                <a:ea typeface="+mn-ea"/>
+                <a:cs typeface="+mn-cs"/>
+              </a:defRPr>
+            </a:lvl3pPr>
+            <a:lvl4pPr marL="1600200" indent="-228600" algn="l" defTabSz="914400" rtl="0" eaLnBrk="1" latinLnBrk="0" hangingPunct="1">
+              <a:lnSpc>
+                <a:spcPct val="90000"/>
+              </a:lnSpc>
+              <a:spcBef>
+                <a:spcPts val="500"/>
+              </a:spcBef>
+              <a:buFont typeface="Arial" panose="020B0604020202020204" pitchFamily="34" charset="0"/>
+              <a:buChar char="•"/>
+              <a:defRPr sz="1800" kern="1200">
+                <a:solidFill>
+                  <a:schemeClr val="tx1"/>
+                </a:solidFill>
+                <a:latin typeface="+mn-lt"/>
+                <a:ea typeface="+mn-ea"/>
+                <a:cs typeface="+mn-cs"/>
+              </a:defRPr>
+            </a:lvl4pPr>
+            <a:lvl5pPr marL="2057400" indent="-228600" algn="l" defTabSz="914400" rtl="0" eaLnBrk="1" latinLnBrk="0" hangingPunct="1">
+              <a:lnSpc>
+                <a:spcPct val="90000"/>
+              </a:lnSpc>
+              <a:spcBef>
+                <a:spcPts val="500"/>
+              </a:spcBef>
+              <a:buFont typeface="Arial" panose="020B0604020202020204" pitchFamily="34" charset="0"/>
+              <a:buChar char="•"/>
+              <a:defRPr sz="1800" kern="1200">
+                <a:solidFill>
+                  <a:schemeClr val="tx1"/>
+                </a:solidFill>
+                <a:latin typeface="+mn-lt"/>
+                <a:ea typeface="+mn-ea"/>
+                <a:cs typeface="+mn-cs"/>
+              </a:defRPr>
+            </a:lvl5pPr>
+            <a:lvl6pPr marL="2514600" indent="-228600" algn="l" defTabSz="914400" rtl="0" eaLnBrk="1" latinLnBrk="0" hangingPunct="1">
+              <a:lnSpc>
+                <a:spcPct val="90000"/>
+              </a:lnSpc>
+              <a:spcBef>
+                <a:spcPts val="500"/>
+              </a:spcBef>
+              <a:buFont typeface="Arial" panose="020B0604020202020204" pitchFamily="34" charset="0"/>
+              <a:buChar char="•"/>
+              <a:defRPr sz="1800" kern="1200">
+                <a:solidFill>
+                  <a:schemeClr val="tx1"/>
+                </a:solidFill>
+                <a:latin typeface="+mn-lt"/>
+                <a:ea typeface="+mn-ea"/>
+                <a:cs typeface="+mn-cs"/>
+              </a:defRPr>
+            </a:lvl6pPr>
+            <a:lvl7pPr marL="2971800" indent="-228600" algn="l" defTabSz="914400" rtl="0" eaLnBrk="1" latinLnBrk="0" hangingPunct="1">
+              <a:lnSpc>
+                <a:spcPct val="90000"/>
+              </a:lnSpc>
+              <a:spcBef>
+                <a:spcPts val="500"/>
+              </a:spcBef>
+              <a:buFont typeface="Arial" panose="020B0604020202020204" pitchFamily="34" charset="0"/>
+              <a:buChar char="•"/>
+              <a:defRPr sz="1800" kern="1200">
+                <a:solidFill>
+                  <a:schemeClr val="tx1"/>
+                </a:solidFill>
+                <a:latin typeface="+mn-lt"/>
+                <a:ea typeface="+mn-ea"/>
+                <a:cs typeface="+mn-cs"/>
+              </a:defRPr>
+            </a:lvl7pPr>
+            <a:lvl8pPr marL="3429000" indent="-228600" algn="l" defTabSz="914400" rtl="0" eaLnBrk="1" latinLnBrk="0" hangingPunct="1">
+              <a:lnSpc>
+                <a:spcPct val="90000"/>
+              </a:lnSpc>
+              <a:spcBef>
+                <a:spcPts val="500"/>
+              </a:spcBef>
+              <a:buFont typeface="Arial" panose="020B0604020202020204" pitchFamily="34" charset="0"/>
+              <a:buChar char="•"/>
+              <a:defRPr sz="1800" kern="1200">
+                <a:solidFill>
+                  <a:schemeClr val="tx1"/>
+                </a:solidFill>
+                <a:latin typeface="+mn-lt"/>
+                <a:ea typeface="+mn-ea"/>
+                <a:cs typeface="+mn-cs"/>
+              </a:defRPr>
+            </a:lvl8pPr>
+            <a:lvl9pPr marL="3886200" indent="-228600" algn="l" defTabSz="914400" rtl="0" eaLnBrk="1" latinLnBrk="0" hangingPunct="1">
+              <a:lnSpc>
+                <a:spcPct val="90000"/>
+              </a:lnSpc>
+              <a:spcBef>
+                <a:spcPts val="500"/>
+              </a:spcBef>
+              <a:buFont typeface="Arial" panose="020B0604020202020204" pitchFamily="34" charset="0"/>
+              <a:buChar char="•"/>
+              <a:defRPr sz="1800" kern="1200">
+                <a:solidFill>
+                  <a:schemeClr val="tx1"/>
+                </a:solidFill>
+                <a:latin typeface="+mn-lt"/>
+                <a:ea typeface="+mn-ea"/>
+                <a:cs typeface="+mn-cs"/>
+              </a:defRPr>
+            </a:lvl9pPr>
+          </a:lstStyle>
+          <a:p>
+            <a:pPr marL="0" indent="0">
+              <a:buFont typeface="Arial" panose="020B0604020202020204" pitchFamily="34" charset="0"/>
+              <a:buNone/>
+            </a:pPr>
+            <a:r>
+              <a:rPr lang="en-US" b="1" dirty="0"/>
+              <a:t>Why SDL2?</a:t>
+            </a:r>
+          </a:p>
+          <a:p>
+            <a:pPr>
+              <a:buFontTx/>
+              <a:buChar char="-"/>
+            </a:pPr>
+            <a:r>
+              <a:rPr lang="en-US" dirty="0"/>
+              <a:t>SDL can read multiple devices at the same time and can distinguish between them</a:t>
+            </a:r>
+          </a:p>
+          <a:p>
+            <a:pPr>
+              <a:buFontTx/>
+              <a:buChar char="-"/>
+            </a:pPr>
+            <a:r>
+              <a:rPr lang="en-US" dirty="0"/>
+              <a:t>SDL can be used across a variety of platforms without the hassle of using platform specific </a:t>
+            </a:r>
+            <a:r>
+              <a:rPr lang="en-US" dirty="0" err="1"/>
+              <a:t>apis</a:t>
+            </a:r>
             <a:endParaRPr lang="en-US" dirty="0"/>
+          </a:p>
+          <a:p>
+            <a:pPr>
+              <a:buFontTx/>
+              <a:buChar char="-"/>
+            </a:pPr>
+            <a:endParaRPr lang="en-GB" dirty="0"/>
           </a:p>
         </p:txBody>
       </p:sp>
     </p:spTree>
     <p:extLst>
       <p:ext uri="{BB962C8B-B14F-4D97-AF65-F5344CB8AC3E}">
-        <p14:creationId xmlns:p14="http://schemas.microsoft.com/office/powerpoint/2010/main" val="268863310"/>
+        <p14:creationId xmlns:p14="http://schemas.microsoft.com/office/powerpoint/2010/main" val="1667238636"/>
+      </p:ext>
+    </p:extLst>
+  </p:cSld>
+  <p:clrMapOvr>
+    <a:masterClrMapping/>
+  </p:clrMapOvr>
+</p:sld>
+</file>
+
+<file path=ppt/slides/slide9.xml><?xml version="1.0" encoding="utf-8"?>
+<p:sld xmlns:a="http://schemas.openxmlformats.org/drawingml/2006/main" xmlns:r="http://schemas.openxmlformats.org/officeDocument/2006/relationships" xmlns:p="http://schemas.openxmlformats.org/presentationml/2006/main">
+  <p:cSld>
+    <p:spTree>
+      <p:nvGrpSpPr>
+        <p:cNvPr id="1" name=""/>
+        <p:cNvGrpSpPr/>
+        <p:nvPr/>
+      </p:nvGrpSpPr>
+      <p:grpSpPr>
+        <a:xfrm>
+          <a:off x="0" y="0"/>
+          <a:ext cx="0" cy="0"/>
+          <a:chOff x="0" y="0"/>
+          <a:chExt cx="0" cy="0"/>
+        </a:xfrm>
+      </p:grpSpPr>
+      <p:sp>
+        <p:nvSpPr>
+          <p:cNvPr id="2" name="Title 1">
+            <a:extLst>
+              <a:ext uri="{FF2B5EF4-FFF2-40B4-BE49-F238E27FC236}">
+                <a16:creationId xmlns:a16="http://schemas.microsoft.com/office/drawing/2014/main" id="{CFB169EE-702B-AA41-A682-8DC7EDA2548E}"/>
+              </a:ext>
+            </a:extLst>
+          </p:cNvPr>
+          <p:cNvSpPr>
+            <a:spLocks noGrp="1"/>
+          </p:cNvSpPr>
+          <p:nvPr>
+            <p:ph type="title"/>
+          </p:nvPr>
+        </p:nvSpPr>
+        <p:spPr>
+          <a:xfrm>
+            <a:off x="838200" y="0"/>
+            <a:ext cx="10515600" cy="1325563"/>
+          </a:xfrm>
+        </p:spPr>
+        <p:txBody>
+          <a:bodyPr/>
+          <a:lstStyle/>
+          <a:p>
+            <a:r>
+              <a:rPr lang="en-US" dirty="0"/>
+              <a:t>How I use SDL2 to read input for my project</a:t>
+            </a:r>
+            <a:endParaRPr lang="en-GB" dirty="0"/>
+          </a:p>
+        </p:txBody>
+      </p:sp>
+      <p:sp>
+        <p:nvSpPr>
+          <p:cNvPr id="3" name="Content Placeholder 2">
+            <a:extLst>
+              <a:ext uri="{FF2B5EF4-FFF2-40B4-BE49-F238E27FC236}">
+                <a16:creationId xmlns:a16="http://schemas.microsoft.com/office/drawing/2014/main" id="{2B1A5B1D-E2DC-AE19-61B0-253CD63E821A}"/>
+              </a:ext>
+            </a:extLst>
+          </p:cNvPr>
+          <p:cNvSpPr>
+            <a:spLocks noGrp="1"/>
+          </p:cNvSpPr>
+          <p:nvPr>
+            <p:ph idx="1"/>
+          </p:nvPr>
+        </p:nvSpPr>
+        <p:spPr>
+          <a:xfrm>
+            <a:off x="838200" y="1092760"/>
+            <a:ext cx="4025630" cy="748962"/>
+          </a:xfrm>
+        </p:spPr>
+        <p:txBody>
+          <a:bodyPr>
+            <a:normAutofit fontScale="92500" lnSpcReduction="10000"/>
+          </a:bodyPr>
+          <a:lstStyle/>
+          <a:p>
+            <a:r>
+              <a:rPr lang="en-US" b="1" dirty="0"/>
+              <a:t>How a keypress event is processed</a:t>
+            </a:r>
+            <a:endParaRPr lang="en-GB" b="1" dirty="0"/>
+          </a:p>
+        </p:txBody>
+      </p:sp>
+      <p:pic>
+        <p:nvPicPr>
+          <p:cNvPr id="5" name="Picture 4">
+            <a:extLst>
+              <a:ext uri="{FF2B5EF4-FFF2-40B4-BE49-F238E27FC236}">
+                <a16:creationId xmlns:a16="http://schemas.microsoft.com/office/drawing/2014/main" id="{4FB62D5B-5997-6499-A455-A166543C6E37}"/>
+              </a:ext>
+            </a:extLst>
+          </p:cNvPr>
+          <p:cNvPicPr>
+            <a:picLocks noChangeAspect="1"/>
+          </p:cNvPicPr>
+          <p:nvPr/>
+        </p:nvPicPr>
+        <p:blipFill>
+          <a:blip r:embed="rId2"/>
+          <a:stretch>
+            <a:fillRect/>
+          </a:stretch>
+        </p:blipFill>
+        <p:spPr>
+          <a:xfrm>
+            <a:off x="705953" y="1968414"/>
+            <a:ext cx="4290124" cy="4624245"/>
+          </a:xfrm>
+          <a:prstGeom prst="rect">
+            <a:avLst/>
+          </a:prstGeom>
+        </p:spPr>
+      </p:pic>
+      <p:sp>
+        <p:nvSpPr>
+          <p:cNvPr id="6" name="TextBox 5">
+            <a:extLst>
+              <a:ext uri="{FF2B5EF4-FFF2-40B4-BE49-F238E27FC236}">
+                <a16:creationId xmlns:a16="http://schemas.microsoft.com/office/drawing/2014/main" id="{50D2E389-8E51-67F9-BC5F-A71F5E1C09E4}"/>
+              </a:ext>
+            </a:extLst>
+          </p:cNvPr>
+          <p:cNvSpPr txBox="1"/>
+          <p:nvPr/>
+        </p:nvSpPr>
+        <p:spPr>
+          <a:xfrm>
+            <a:off x="5654489" y="1156447"/>
+            <a:ext cx="6158752" cy="5262979"/>
+          </a:xfrm>
+          <a:prstGeom prst="rect">
+            <a:avLst/>
+          </a:prstGeom>
+          <a:noFill/>
+        </p:spPr>
+        <p:txBody>
+          <a:bodyPr wrap="square" rtlCol="0">
+            <a:spAutoFit/>
+          </a:bodyPr>
+          <a:lstStyle/>
+          <a:p>
+            <a:r>
+              <a:rPr lang="en-US" sz="2800" b="1" dirty="0"/>
+              <a:t>Key points</a:t>
+            </a:r>
+            <a:br>
+              <a:rPr lang="en-US" sz="2800" b="1" dirty="0"/>
+            </a:br>
+            <a:r>
+              <a:rPr lang="en-US" sz="2800" dirty="0"/>
+              <a:t>- input events are discovered and sent in the main program thread</a:t>
+            </a:r>
+          </a:p>
+          <a:p>
+            <a:endParaRPr lang="en-US" sz="2800" dirty="0"/>
+          </a:p>
+          <a:p>
+            <a:r>
+              <a:rPr lang="en-US" sz="2800" dirty="0"/>
+              <a:t>- Each device has a unique input translator class which is stored per game instance</a:t>
+            </a:r>
+          </a:p>
+          <a:p>
+            <a:endParaRPr lang="en-US" sz="2800" dirty="0"/>
+          </a:p>
+          <a:p>
+            <a:r>
+              <a:rPr lang="en-US" sz="2800" dirty="0"/>
+              <a:t>- The input translator class stores the current state of the device, including which keys are pressed and where the cursor is</a:t>
+            </a:r>
+            <a:endParaRPr lang="en-GB" sz="2800" dirty="0"/>
+          </a:p>
+        </p:txBody>
+      </p:sp>
+    </p:spTree>
+    <p:extLst>
+      <p:ext uri="{BB962C8B-B14F-4D97-AF65-F5344CB8AC3E}">
+        <p14:creationId xmlns:p14="http://schemas.microsoft.com/office/powerpoint/2010/main" val="1763007847"/>
       </p:ext>
     </p:extLst>
   </p:cSld>

--- a/documents/Henry Frodsham FYP.pptx
+++ b/documents/Henry Frodsham FYP.pptx
@@ -6,9 +6,9 @@
   </p:sldMasterIdLst>
   <p:sldIdLst>
     <p:sldId id="256" r:id="rId2"/>
-    <p:sldId id="258" r:id="rId3"/>
-    <p:sldId id="270" r:id="rId4"/>
-    <p:sldId id="261" r:id="rId5"/>
+    <p:sldId id="261" r:id="rId3"/>
+    <p:sldId id="258" r:id="rId4"/>
+    <p:sldId id="270" r:id="rId5"/>
     <p:sldId id="257" r:id="rId6"/>
     <p:sldId id="262" r:id="rId7"/>
     <p:sldId id="268" r:id="rId8"/>
@@ -310,7 +310,7 @@
           <a:p>
             <a:fld id="{8BF12ED9-0777-4B04-BE13-DED9E716DBE4}" type="datetimeFigureOut">
               <a:rPr lang="en-GB" smtClean="0"/>
-              <a:t>04/12/2025</a:t>
+              <a:t>07/12/2025</a:t>
             </a:fld>
             <a:endParaRPr lang="en-GB"/>
           </a:p>
@@ -608,7 +608,7 @@
           <a:p>
             <a:fld id="{8BF12ED9-0777-4B04-BE13-DED9E716DBE4}" type="datetimeFigureOut">
               <a:rPr lang="en-GB" smtClean="0"/>
-              <a:t>04/12/2025</a:t>
+              <a:t>07/12/2025</a:t>
             </a:fld>
             <a:endParaRPr lang="en-GB"/>
           </a:p>
@@ -800,7 +800,7 @@
           <a:p>
             <a:fld id="{8BF12ED9-0777-4B04-BE13-DED9E716DBE4}" type="datetimeFigureOut">
               <a:rPr lang="en-GB" smtClean="0"/>
-              <a:t>04/12/2025</a:t>
+              <a:t>07/12/2025</a:t>
             </a:fld>
             <a:endParaRPr lang="en-GB"/>
           </a:p>
@@ -1061,7 +1061,7 @@
           <a:p>
             <a:fld id="{8BF12ED9-0777-4B04-BE13-DED9E716DBE4}" type="datetimeFigureOut">
               <a:rPr lang="en-GB" smtClean="0"/>
-              <a:t>04/12/2025</a:t>
+              <a:t>07/12/2025</a:t>
             </a:fld>
             <a:endParaRPr lang="en-GB"/>
           </a:p>
@@ -1485,7 +1485,7 @@
           <a:p>
             <a:fld id="{8BF12ED9-0777-4B04-BE13-DED9E716DBE4}" type="datetimeFigureOut">
               <a:rPr lang="en-GB" smtClean="0"/>
-              <a:t>04/12/2025</a:t>
+              <a:t>07/12/2025</a:t>
             </a:fld>
             <a:endParaRPr lang="en-GB"/>
           </a:p>
@@ -2022,7 +2022,7 @@
           <a:p>
             <a:fld id="{8BF12ED9-0777-4B04-BE13-DED9E716DBE4}" type="datetimeFigureOut">
               <a:rPr lang="en-GB" smtClean="0"/>
-              <a:t>04/12/2025</a:t>
+              <a:t>07/12/2025</a:t>
             </a:fld>
             <a:endParaRPr lang="en-GB"/>
           </a:p>
@@ -2886,7 +2886,7 @@
           <a:p>
             <a:fld id="{8BF12ED9-0777-4B04-BE13-DED9E716DBE4}" type="datetimeFigureOut">
               <a:rPr lang="en-GB" smtClean="0"/>
-              <a:t>04/12/2025</a:t>
+              <a:t>07/12/2025</a:t>
             </a:fld>
             <a:endParaRPr lang="en-GB"/>
           </a:p>
@@ -3056,7 +3056,7 @@
           <a:p>
             <a:fld id="{8BF12ED9-0777-4B04-BE13-DED9E716DBE4}" type="datetimeFigureOut">
               <a:rPr lang="en-GB" smtClean="0"/>
-              <a:t>04/12/2025</a:t>
+              <a:t>07/12/2025</a:t>
             </a:fld>
             <a:endParaRPr lang="en-GB"/>
           </a:p>
@@ -3240,7 +3240,7 @@
           <a:p>
             <a:fld id="{8BF12ED9-0777-4B04-BE13-DED9E716DBE4}" type="datetimeFigureOut">
               <a:rPr lang="en-GB" smtClean="0"/>
-              <a:t>04/12/2025</a:t>
+              <a:t>07/12/2025</a:t>
             </a:fld>
             <a:endParaRPr lang="en-GB"/>
           </a:p>
@@ -3410,7 +3410,7 @@
           <a:p>
             <a:fld id="{8BF12ED9-0777-4B04-BE13-DED9E716DBE4}" type="datetimeFigureOut">
               <a:rPr lang="en-GB" smtClean="0"/>
-              <a:t>04/12/2025</a:t>
+              <a:t>07/12/2025</a:t>
             </a:fld>
             <a:endParaRPr lang="en-GB"/>
           </a:p>
@@ -3654,7 +3654,7 @@
           <a:p>
             <a:fld id="{8BF12ED9-0777-4B04-BE13-DED9E716DBE4}" type="datetimeFigureOut">
               <a:rPr lang="en-GB" smtClean="0"/>
-              <a:t>04/12/2025</a:t>
+              <a:t>07/12/2025</a:t>
             </a:fld>
             <a:endParaRPr lang="en-GB"/>
           </a:p>
@@ -3890,7 +3890,7 @@
           <a:p>
             <a:fld id="{8BF12ED9-0777-4B04-BE13-DED9E716DBE4}" type="datetimeFigureOut">
               <a:rPr lang="en-GB" smtClean="0"/>
-              <a:t>04/12/2025</a:t>
+              <a:t>07/12/2025</a:t>
             </a:fld>
             <a:endParaRPr lang="en-GB"/>
           </a:p>
@@ -4356,7 +4356,7 @@
           <a:p>
             <a:fld id="{8BF12ED9-0777-4B04-BE13-DED9E716DBE4}" type="datetimeFigureOut">
               <a:rPr lang="en-GB" smtClean="0"/>
-              <a:t>04/12/2025</a:t>
+              <a:t>07/12/2025</a:t>
             </a:fld>
             <a:endParaRPr lang="en-GB"/>
           </a:p>
@@ -4474,7 +4474,7 @@
           <a:p>
             <a:fld id="{8BF12ED9-0777-4B04-BE13-DED9E716DBE4}" type="datetimeFigureOut">
               <a:rPr lang="en-GB" smtClean="0"/>
-              <a:t>04/12/2025</a:t>
+              <a:t>07/12/2025</a:t>
             </a:fld>
             <a:endParaRPr lang="en-GB"/>
           </a:p>
@@ -4569,7 +4569,7 @@
           <a:p>
             <a:fld id="{8BF12ED9-0777-4B04-BE13-DED9E716DBE4}" type="datetimeFigureOut">
               <a:rPr lang="en-GB" smtClean="0"/>
-              <a:t>04/12/2025</a:t>
+              <a:t>07/12/2025</a:t>
             </a:fld>
             <a:endParaRPr lang="en-GB"/>
           </a:p>
@@ -4824,7 +4824,7 @@
           <a:p>
             <a:fld id="{8BF12ED9-0777-4B04-BE13-DED9E716DBE4}" type="datetimeFigureOut">
               <a:rPr lang="en-GB" smtClean="0"/>
-              <a:t>04/12/2025</a:t>
+              <a:t>07/12/2025</a:t>
             </a:fld>
             <a:endParaRPr lang="en-GB"/>
           </a:p>
@@ -5124,7 +5124,7 @@
           <a:p>
             <a:fld id="{8BF12ED9-0777-4B04-BE13-DED9E716DBE4}" type="datetimeFigureOut">
               <a:rPr lang="en-GB" smtClean="0"/>
-              <a:t>04/12/2025</a:t>
+              <a:t>07/12/2025</a:t>
             </a:fld>
             <a:endParaRPr lang="en-GB"/>
           </a:p>
@@ -5358,7 +5358,7 @@
           <a:p>
             <a:fld id="{8BF12ED9-0777-4B04-BE13-DED9E716DBE4}" type="datetimeFigureOut">
               <a:rPr lang="en-GB" smtClean="0"/>
-              <a:t>04/12/2025</a:t>
+              <a:t>07/12/2025</a:t>
             </a:fld>
             <a:endParaRPr lang="en-GB"/>
           </a:p>
@@ -6065,6 +6065,43 @@
           </a:p>
         </p:txBody>
       </p:sp>
+      <p:sp>
+        <p:nvSpPr>
+          <p:cNvPr id="3" name="TextBox 2">
+            <a:extLst>
+              <a:ext uri="{FF2B5EF4-FFF2-40B4-BE49-F238E27FC236}">
+                <a16:creationId xmlns:a16="http://schemas.microsoft.com/office/drawing/2014/main" id="{188EC741-7B41-F303-FC21-1112512A10C0}"/>
+              </a:ext>
+            </a:extLst>
+          </p:cNvPr>
+          <p:cNvSpPr txBox="1"/>
+          <p:nvPr/>
+        </p:nvSpPr>
+        <p:spPr>
+          <a:xfrm>
+            <a:off x="2154725" y="3602456"/>
+            <a:ext cx="8519311" cy="646331"/>
+          </a:xfrm>
+          <a:prstGeom prst="rect">
+            <a:avLst/>
+          </a:prstGeom>
+          <a:noFill/>
+        </p:spPr>
+        <p:txBody>
+          <a:bodyPr wrap="square" rtlCol="0">
+            <a:spAutoFit/>
+          </a:bodyPr>
+          <a:lstStyle/>
+          <a:p>
+            <a:r>
+              <a:rPr lang="en-GB" sz="3600" dirty="0">
+                <a:latin typeface="Abadi" panose="020F0502020204030204" pitchFamily="34" charset="0"/>
+              </a:rPr>
+              <a:t>a concurrency based game environment</a:t>
+            </a:r>
+          </a:p>
+        </p:txBody>
+      </p:sp>
     </p:spTree>
     <p:extLst>
       <p:ext uri="{BB962C8B-B14F-4D97-AF65-F5344CB8AC3E}">
@@ -7186,7 +7223,7 @@
           <p:cNvPr id="2" name="Title 1">
             <a:extLst>
               <a:ext uri="{FF2B5EF4-FFF2-40B4-BE49-F238E27FC236}">
-                <a16:creationId xmlns:a16="http://schemas.microsoft.com/office/drawing/2014/main" id="{8E2E6D9F-D07D-4740-DECB-C42A64056C85}"/>
+                <a16:creationId xmlns:a16="http://schemas.microsoft.com/office/drawing/2014/main" id="{EF0A3931-18B6-C022-412D-D9556F471522}"/>
               </a:ext>
             </a:extLst>
           </p:cNvPr>
@@ -7199,16 +7236,14 @@
         </p:nvSpPr>
         <p:spPr/>
         <p:txBody>
-          <a:bodyPr>
-            <a:normAutofit fontScale="90000"/>
-          </a:bodyPr>
+          <a:bodyPr/>
           <a:lstStyle/>
           <a:p>
             <a:r>
               <a:rPr lang="en-US" dirty="0">
                 <a:latin typeface="Abadi" panose="020B0604020104020204" pitchFamily="34" charset="0"/>
               </a:rPr>
-              <a:t>Why concurrency matters in game development</a:t>
+              <a:t>An overview of my project</a:t>
             </a:r>
             <a:endParaRPr lang="en-GB" dirty="0">
               <a:latin typeface="Abadi" panose="020B0604020104020204" pitchFamily="34" charset="0"/>
@@ -7221,7 +7256,7 @@
           <p:cNvPr id="3" name="Content Placeholder 2">
             <a:extLst>
               <a:ext uri="{FF2B5EF4-FFF2-40B4-BE49-F238E27FC236}">
-                <a16:creationId xmlns:a16="http://schemas.microsoft.com/office/drawing/2014/main" id="{ACBAA111-6C11-C444-9DC0-D077CA4F067A}"/>
+                <a16:creationId xmlns:a16="http://schemas.microsoft.com/office/drawing/2014/main" id="{D7E4F512-C0E6-D180-A685-5F0C8A9C99CD}"/>
               </a:ext>
             </a:extLst>
           </p:cNvPr>
@@ -7243,13 +7278,13 @@
               <a:rPr lang="en-US" sz="2400" b="1" dirty="0">
                 <a:latin typeface="Abadi" panose="020B0604020104020204" pitchFamily="34" charset="0"/>
               </a:rPr>
-              <a:t>Responsiveness</a:t>
+              <a:t>Genre</a:t>
             </a:r>
             <a:r>
               <a:rPr lang="en-US" sz="2400" dirty="0">
                 <a:latin typeface="Abadi" panose="020B0604020104020204" pitchFamily="34" charset="0"/>
               </a:rPr>
-              <a:t>: Keeps UI and input smooth during performance-intensive operations</a:t>
+              <a:t>: Real-time strategy with split-screen multiplayer</a:t>
             </a:r>
           </a:p>
           <a:p>
@@ -7257,43 +7292,63 @@
               <a:rPr lang="en-US" sz="2400" b="1" dirty="0">
                 <a:latin typeface="Abadi" panose="020B0604020104020204" pitchFamily="34" charset="0"/>
               </a:rPr>
-              <a:t>Performance</a:t>
+              <a:t>Country based: </a:t>
             </a:r>
             <a:r>
               <a:rPr lang="en-US" sz="2400" dirty="0">
                 <a:latin typeface="Abadi" panose="020B0604020104020204" pitchFamily="34" charset="0"/>
               </a:rPr>
-              <a:t>: Parallelizes game logic across threads for faster execution</a:t>
-            </a:r>
+              <a:t>the classic strategy formula of multiple countries competing </a:t>
+            </a:r>
+            <a:endParaRPr lang="en-US" sz="2400" b="1" dirty="0">
+              <a:latin typeface="Abadi" panose="020B0604020104020204" pitchFamily="34" charset="0"/>
+            </a:endParaRPr>
           </a:p>
           <a:p>
             <a:r>
               <a:rPr lang="en-US" sz="2400" b="1" dirty="0">
                 <a:latin typeface="Abadi" panose="020B0604020104020204" pitchFamily="34" charset="0"/>
               </a:rPr>
-              <a:t>Hardware Utilization</a:t>
+              <a:t>Performance focus: </a:t>
             </a:r>
             <a:r>
               <a:rPr lang="en-US" sz="2400" dirty="0">
                 <a:latin typeface="Abadi" panose="020B0604020104020204" pitchFamily="34" charset="0"/>
               </a:rPr>
-              <a:t>: Leverages modern multi-core CPUs that would otherwise sit idle</a:t>
-            </a:r>
+              <a:t>optimized for longer games with more units on the screen</a:t>
+            </a:r>
+            <a:endParaRPr lang="en-US" sz="2400" b="1" dirty="0">
+              <a:latin typeface="Abadi" panose="020B0604020104020204" pitchFamily="34" charset="0"/>
+            </a:endParaRPr>
           </a:p>
           <a:p>
             <a:r>
               <a:rPr lang="en-US" sz="2400" b="1" dirty="0">
                 <a:latin typeface="Abadi" panose="020B0604020104020204" pitchFamily="34" charset="0"/>
               </a:rPr>
-              <a:t>Scalability</a:t>
+              <a:t>Local Multiplayer</a:t>
             </a:r>
             <a:r>
               <a:rPr lang="en-US" sz="2400" dirty="0">
                 <a:latin typeface="Abadi" panose="020B0604020104020204" pitchFamily="34" charset="0"/>
               </a:rPr>
-              <a:t>: Enables games to handle more entities, complex AI, and detailed physics simulations simultaneously</a:t>
-            </a:r>
-            <a:endParaRPr lang="en-GB" sz="2400" dirty="0">
+              <a:t>: Supports up to 5 players (1 keyboard + 4 controllers)</a:t>
+            </a:r>
+          </a:p>
+          <a:p>
+            <a:r>
+              <a:rPr lang="en-US" sz="2400" b="1" dirty="0">
+                <a:latin typeface="Abadi" panose="020B0604020104020204" pitchFamily="34" charset="0"/>
+              </a:rPr>
+              <a:t>Split screen with birds eye view: </a:t>
+            </a:r>
+            <a:r>
+              <a:rPr lang="en-US" sz="2400" dirty="0">
+                <a:latin typeface="Abadi" panose="020B0604020104020204" pitchFamily="34" charset="0"/>
+              </a:rPr>
+              <a:t>each player has a dedicated portion of the screen with a bird's eye view of the game world</a:t>
+            </a:r>
+            <a:endParaRPr lang="en-US" sz="2400" b="1" dirty="0">
               <a:latin typeface="Abadi" panose="020B0604020104020204" pitchFamily="34" charset="0"/>
             </a:endParaRPr>
           </a:p>
@@ -7302,7 +7357,7 @@
     </p:spTree>
     <p:extLst>
       <p:ext uri="{BB962C8B-B14F-4D97-AF65-F5344CB8AC3E}">
-        <p14:creationId xmlns:p14="http://schemas.microsoft.com/office/powerpoint/2010/main" val="2791909652"/>
+        <p14:creationId xmlns:p14="http://schemas.microsoft.com/office/powerpoint/2010/main" val="2344679657"/>
       </p:ext>
     </p:extLst>
   </p:cSld>
@@ -7334,7 +7389,7 @@
           <p:cNvPr id="2" name="Title 1">
             <a:extLst>
               <a:ext uri="{FF2B5EF4-FFF2-40B4-BE49-F238E27FC236}">
-                <a16:creationId xmlns:a16="http://schemas.microsoft.com/office/drawing/2014/main" id="{FC2B2806-2F42-BD27-D3F7-1A62A23FD247}"/>
+                <a16:creationId xmlns:a16="http://schemas.microsoft.com/office/drawing/2014/main" id="{8E2E6D9F-D07D-4740-DECB-C42A64056C85}"/>
               </a:ext>
             </a:extLst>
           </p:cNvPr>
@@ -7347,14 +7402,16 @@
         </p:nvSpPr>
         <p:spPr/>
         <p:txBody>
-          <a:bodyPr/>
+          <a:bodyPr>
+            <a:normAutofit/>
+          </a:bodyPr>
           <a:lstStyle/>
           <a:p>
             <a:r>
               <a:rPr lang="en-US" dirty="0">
                 <a:latin typeface="Abadi" panose="020B0604020104020204" pitchFamily="34" charset="0"/>
               </a:rPr>
-              <a:t>Why I chose this project</a:t>
+              <a:t>Why concurrency matters in game development</a:t>
             </a:r>
             <a:endParaRPr lang="en-GB" dirty="0">
               <a:latin typeface="Abadi" panose="020B0604020104020204" pitchFamily="34" charset="0"/>
@@ -7367,7 +7424,7 @@
           <p:cNvPr id="3" name="Content Placeholder 2">
             <a:extLst>
               <a:ext uri="{FF2B5EF4-FFF2-40B4-BE49-F238E27FC236}">
-                <a16:creationId xmlns:a16="http://schemas.microsoft.com/office/drawing/2014/main" id="{9CB27EE3-3C3A-AAB2-B05B-2037E00F3D8E}"/>
+                <a16:creationId xmlns:a16="http://schemas.microsoft.com/office/drawing/2014/main" id="{ACBAA111-6C11-C444-9DC0-D077CA4F067A}"/>
               </a:ext>
             </a:extLst>
           </p:cNvPr>
@@ -7389,13 +7446,13 @@
               <a:rPr lang="en-US" sz="2400" b="1" dirty="0">
                 <a:latin typeface="Abadi" panose="020B0604020104020204" pitchFamily="34" charset="0"/>
               </a:rPr>
-              <a:t>Split screen rarity in RTS genre: </a:t>
+              <a:t>Responsiveness</a:t>
             </a:r>
             <a:r>
               <a:rPr lang="en-US" sz="2400" dirty="0">
                 <a:latin typeface="Abadi" panose="020B0604020104020204" pitchFamily="34" charset="0"/>
               </a:rPr>
-              <a:t>all major studios producing real time strategy games don’t implement split screen e.g. paradox</a:t>
+              <a:t>: Keeps UI and input smooth during performance-intensive operations</a:t>
             </a:r>
           </a:p>
           <a:p>
@@ -7403,13 +7460,13 @@
               <a:rPr lang="en-US" sz="2400" b="1" dirty="0">
                 <a:latin typeface="Abadi" panose="020B0604020104020204" pitchFamily="34" charset="0"/>
               </a:rPr>
-              <a:t>Slow performance of major RTS games: </a:t>
+              <a:t>Performance</a:t>
             </a:r>
             <a:r>
               <a:rPr lang="en-US" sz="2400" dirty="0">
                 <a:latin typeface="Abadi" panose="020B0604020104020204" pitchFamily="34" charset="0"/>
               </a:rPr>
-              <a:t>slow performance is a common theme among popular real time strategy games such as stellaris. Most RTS games aren’t optimized for long saves.</a:t>
+              <a:t>: Parallelizes game logic across threads for faster execution</a:t>
             </a:r>
           </a:p>
           <a:p>
@@ -7417,27 +7474,29 @@
               <a:rPr lang="en-US" sz="2400" b="1" dirty="0">
                 <a:latin typeface="Abadi" panose="020B0604020104020204" pitchFamily="34" charset="0"/>
               </a:rPr>
-              <a:t> lack of efficient concurrency: </a:t>
+              <a:t>Hardware Utilization</a:t>
             </a:r>
             <a:r>
               <a:rPr lang="en-US" sz="2400" dirty="0">
                 <a:latin typeface="Abadi" panose="020B0604020104020204" pitchFamily="34" charset="0"/>
               </a:rPr>
-              <a:t>while most real time strategy games are closed source, open source RTS games such as </a:t>
-            </a:r>
-            <a:r>
-              <a:rPr lang="en-US" sz="2400" dirty="0" err="1">
-                <a:latin typeface="Abadi" panose="020B0604020104020204" pitchFamily="34" charset="0"/>
-              </a:rPr>
-              <a:t>openfront</a:t>
+              <a:t>: Leverages modern multi-core CPUs that would otherwise sit idle</a:t>
+            </a:r>
+          </a:p>
+          <a:p>
+            <a:r>
+              <a:rPr lang="en-US" sz="2400" b="1" dirty="0">
+                <a:latin typeface="Abadi" panose="020B0604020104020204" pitchFamily="34" charset="0"/>
+              </a:rPr>
+              <a:t>Scalability</a:t>
             </a:r>
             <a:r>
               <a:rPr lang="en-US" sz="2400" dirty="0">
                 <a:latin typeface="Abadi" panose="020B0604020104020204" pitchFamily="34" charset="0"/>
               </a:rPr>
-              <a:t> don’t implement multi threading and suffer from lack of input responsiveness as a result.</a:t>
-            </a:r>
-            <a:endParaRPr lang="en-GB" sz="2400" b="1" dirty="0">
+              <a:t>: Enables games to handle more entities, complex AI, and detailed physics simulations simultaneously</a:t>
+            </a:r>
+            <a:endParaRPr lang="en-GB" sz="2400" dirty="0">
               <a:latin typeface="Abadi" panose="020B0604020104020204" pitchFamily="34" charset="0"/>
             </a:endParaRPr>
           </a:p>
@@ -7446,7 +7505,7 @@
     </p:spTree>
     <p:extLst>
       <p:ext uri="{BB962C8B-B14F-4D97-AF65-F5344CB8AC3E}">
-        <p14:creationId xmlns:p14="http://schemas.microsoft.com/office/powerpoint/2010/main" val="3662044860"/>
+        <p14:creationId xmlns:p14="http://schemas.microsoft.com/office/powerpoint/2010/main" val="2791909652"/>
       </p:ext>
     </p:extLst>
   </p:cSld>
@@ -7478,7 +7537,7 @@
           <p:cNvPr id="2" name="Title 1">
             <a:extLst>
               <a:ext uri="{FF2B5EF4-FFF2-40B4-BE49-F238E27FC236}">
-                <a16:creationId xmlns:a16="http://schemas.microsoft.com/office/drawing/2014/main" id="{EF0A3931-18B6-C022-412D-D9556F471522}"/>
+                <a16:creationId xmlns:a16="http://schemas.microsoft.com/office/drawing/2014/main" id="{FC2B2806-2F42-BD27-D3F7-1A62A23FD247}"/>
               </a:ext>
             </a:extLst>
           </p:cNvPr>
@@ -7498,7 +7557,7 @@
               <a:rPr lang="en-US" dirty="0">
                 <a:latin typeface="Abadi" panose="020B0604020104020204" pitchFamily="34" charset="0"/>
               </a:rPr>
-              <a:t>An overview of my project</a:t>
+              <a:t>Why I chose this project</a:t>
             </a:r>
             <a:endParaRPr lang="en-GB" dirty="0">
               <a:latin typeface="Abadi" panose="020B0604020104020204" pitchFamily="34" charset="0"/>
@@ -7511,7 +7570,7 @@
           <p:cNvPr id="3" name="Content Placeholder 2">
             <a:extLst>
               <a:ext uri="{FF2B5EF4-FFF2-40B4-BE49-F238E27FC236}">
-                <a16:creationId xmlns:a16="http://schemas.microsoft.com/office/drawing/2014/main" id="{D7E4F512-C0E6-D180-A685-5F0C8A9C99CD}"/>
+                <a16:creationId xmlns:a16="http://schemas.microsoft.com/office/drawing/2014/main" id="{9CB27EE3-3C3A-AAB2-B05B-2037E00F3D8E}"/>
               </a:ext>
             </a:extLst>
           </p:cNvPr>
@@ -7533,13 +7592,13 @@
               <a:rPr lang="en-US" sz="2400" b="1" dirty="0">
                 <a:latin typeface="Abadi" panose="020B0604020104020204" pitchFamily="34" charset="0"/>
               </a:rPr>
-              <a:t>Genre</a:t>
+              <a:t>Split screen rarity in RTS genre: </a:t>
             </a:r>
             <a:r>
               <a:rPr lang="en-US" sz="2400" dirty="0">
                 <a:latin typeface="Abadi" panose="020B0604020104020204" pitchFamily="34" charset="0"/>
               </a:rPr>
-              <a:t>: Real-time strategy with split-screen multiplayer</a:t>
+              <a:t>all major studios producing real time strategy games don’t implement split screen e.g. paradox</a:t>
             </a:r>
           </a:p>
           <a:p>
@@ -7547,63 +7606,41 @@
               <a:rPr lang="en-US" sz="2400" b="1" dirty="0">
                 <a:latin typeface="Abadi" panose="020B0604020104020204" pitchFamily="34" charset="0"/>
               </a:rPr>
-              <a:t>Country based: </a:t>
+              <a:t>Slow performance of major RTS games: </a:t>
             </a:r>
             <a:r>
               <a:rPr lang="en-US" sz="2400" dirty="0">
                 <a:latin typeface="Abadi" panose="020B0604020104020204" pitchFamily="34" charset="0"/>
               </a:rPr>
-              <a:t>the classic strategy formula of multiple countries competing </a:t>
-            </a:r>
-            <a:endParaRPr lang="en-US" sz="2400" b="1" dirty="0">
-              <a:latin typeface="Abadi" panose="020B0604020104020204" pitchFamily="34" charset="0"/>
-            </a:endParaRPr>
+              <a:t>slow performance is a common theme among popular real time strategy games such as stellaris. Most RTS games aren’t optimized for long saves.</a:t>
+            </a:r>
           </a:p>
           <a:p>
             <a:r>
               <a:rPr lang="en-US" sz="2400" b="1" dirty="0">
                 <a:latin typeface="Abadi" panose="020B0604020104020204" pitchFamily="34" charset="0"/>
               </a:rPr>
-              <a:t>Performance focus: </a:t>
+              <a:t> lack of efficient concurrency: </a:t>
             </a:r>
             <a:r>
               <a:rPr lang="en-US" sz="2400" dirty="0">
                 <a:latin typeface="Abadi" panose="020B0604020104020204" pitchFamily="34" charset="0"/>
               </a:rPr>
-              <a:t>optimized for longer games with more units on the screen</a:t>
-            </a:r>
-            <a:endParaRPr lang="en-US" sz="2400" b="1" dirty="0">
-              <a:latin typeface="Abadi" panose="020B0604020104020204" pitchFamily="34" charset="0"/>
-            </a:endParaRPr>
-          </a:p>
-          <a:p>
-            <a:r>
-              <a:rPr lang="en-US" sz="2400" b="1" dirty="0">
-                <a:latin typeface="Abadi" panose="020B0604020104020204" pitchFamily="34" charset="0"/>
-              </a:rPr>
-              <a:t>Local Multiplayer</a:t>
+              <a:t>while most real time strategy games are closed source, open source RTS games such as </a:t>
+            </a:r>
+            <a:r>
+              <a:rPr lang="en-US" sz="2400" dirty="0" err="1">
+                <a:latin typeface="Abadi" panose="020B0604020104020204" pitchFamily="34" charset="0"/>
+              </a:rPr>
+              <a:t>openfront</a:t>
             </a:r>
             <a:r>
               <a:rPr lang="en-US" sz="2400" dirty="0">
                 <a:latin typeface="Abadi" panose="020B0604020104020204" pitchFamily="34" charset="0"/>
               </a:rPr>
-              <a:t>: Supports up to 5 players (1 keyboard + 4 controllers)</a:t>
-            </a:r>
-          </a:p>
-          <a:p>
-            <a:r>
-              <a:rPr lang="en-US" sz="2400" b="1" dirty="0">
-                <a:latin typeface="Abadi" panose="020B0604020104020204" pitchFamily="34" charset="0"/>
-              </a:rPr>
-              <a:t>Split screen with birds eye view: </a:t>
-            </a:r>
-            <a:r>
-              <a:rPr lang="en-US" sz="2400" dirty="0">
-                <a:latin typeface="Abadi" panose="020B0604020104020204" pitchFamily="34" charset="0"/>
-              </a:rPr>
-              <a:t>each player has a dedicated portion of the screen with a bird's eye view of the game world</a:t>
-            </a:r>
-            <a:endParaRPr lang="en-US" sz="2400" b="1" dirty="0">
+              <a:t> don’t implement multi threading and suffer from lack of input responsiveness as a result.</a:t>
+            </a:r>
+            <a:endParaRPr lang="en-GB" sz="2400" b="1" dirty="0">
               <a:latin typeface="Abadi" panose="020B0604020104020204" pitchFamily="34" charset="0"/>
             </a:endParaRPr>
           </a:p>
@@ -7612,7 +7649,7 @@
     </p:spTree>
     <p:extLst>
       <p:ext uri="{BB962C8B-B14F-4D97-AF65-F5344CB8AC3E}">
-        <p14:creationId xmlns:p14="http://schemas.microsoft.com/office/powerpoint/2010/main" val="2344679657"/>
+        <p14:creationId xmlns:p14="http://schemas.microsoft.com/office/powerpoint/2010/main" val="3662044860"/>
       </p:ext>
     </p:extLst>
   </p:cSld>
